--- a/docs/slides/OpenEvolve_CrewAI_Teaching_EN.pptx
+++ b/docs/slides/OpenEvolve_CrewAI_Teaching_EN.pptx
@@ -1510,7 +1510,7 @@
           <a:p>
             <a:r>
               <a:rPr lang="en-US" dirty="0"/>
-              <a:t/>
+              <a:t>Set up the story: turning a crash-prone tool-calling system into a safely evolvable multi-agent system.</a:t>
             </a:r>
             <a:endParaRPr lang="en-US" dirty="0"/>
           </a:p>
@@ -1598,7 +1598,7 @@
           <a:p>
             <a:r>
               <a:rPr lang="en-US" dirty="0"/>
-              <a:t/>
+              <a:t>The founding principle: freeze how a tool is called, let how it's used evolve; worst case is graceful degradation.</a:t>
             </a:r>
             <a:endParaRPr lang="en-US" dirty="0"/>
           </a:p>
@@ -1686,7 +1686,7 @@
           <a:p>
             <a:r>
               <a:rPr lang="en-US" dirty="0"/>
-              <a:t/>
+              <a:t>Three defenses — L0 to see it, L1 to use it safely, L2 to build it safely.</a:t>
             </a:r>
             <a:endParaRPr lang="en-US" dirty="0"/>
           </a:p>
@@ -1774,7 +1774,7 @@
           <a:p>
             <a:r>
               <a:rPr lang="en-US" dirty="0"/>
-              <a:t/>
+              <a:t>L0 logs every tool call so the blind spot becomes a signal the next mutation can act on — a pure add-on.</a:t>
             </a:r>
             <a:endParaRPr lang="en-US" dirty="0"/>
           </a:p>
@@ -1862,7 +1862,7 @@
           <a:p>
             <a:r>
               <a:rPr lang="en-US" dirty="0"/>
-              <a:t/>
+              <a:t>The executor clamps any illegal policy back into the legal space and never raises, so the pipeline can't crash.</a:t>
             </a:r>
             <a:endParaRPr lang="en-US" dirty="0"/>
           </a:p>
@@ -1950,7 +1950,7 @@
           <a:p>
             <a:r>
               <a:rPr lang="en-US" dirty="0"/>
-              <a:t/>
+              <a:t>Bust the misconception: a frozen whitelist is the alphabet, the policy is the sentence — the real ceiling is the dataset.</a:t>
             </a:r>
             <a:endParaRPr lang="en-US" dirty="0"/>
           </a:p>
@@ -2038,7 +2038,7 @@
           <a:p>
             <a:r>
               <a:rPr lang="en-US" dirty="0"/>
-              <a:t/>
+              <a:t>Wiring turns data_retriever from a tool-caller into a text extractor, removing the crash risk entirely.</a:t>
             </a:r>
             <a:endParaRPr lang="en-US" dirty="0"/>
           </a:p>
@@ -2126,7 +2126,7 @@
           <a:p>
             <a:r>
               <a:rPr lang="en-US" dirty="0"/>
-              <a:t/>
+              <a:t>L2 lets evolution invent tools through four sandbox gates, with ReadOnlyKit funneling everything to read-only data.</a:t>
             </a:r>
             <a:endParaRPr lang="en-US" dirty="0"/>
           </a:p>
@@ -2214,7 +2214,7 @@
           <a:p>
             <a:r>
               <a:rPr lang="en-US" dirty="0"/>
-              <a:t/>
+              <a:t>Docstrings co-evolve because the agent reads them to decide; tools mount on the analyst, the decision point.</a:t>
             </a:r>
             <a:endParaRPr lang="en-US" dirty="0"/>
           </a:p>
@@ -2302,7 +2302,7 @@
           <a:p>
             <a:r>
               <a:rPr lang="en-US" dirty="0"/>
-              <a:t/>
+              <a:t>A disjoint holdout exposes overfitting — a big train-minus-holdout gap means it memorized rather than generalized.</a:t>
             </a:r>
             <a:endParaRPr lang="en-US" dirty="0"/>
           </a:p>
@@ -2390,7 +2390,7 @@
           <a:p>
             <a:r>
               <a:rPr lang="en-US" dirty="0"/>
-              <a:t/>
+              <a:t>Use the two sub-metrics as diversity dimensions so extreme specialists survive instead of being averaged away.</a:t>
             </a:r>
             <a:endParaRPr lang="en-US" dirty="0"/>
           </a:p>
@@ -2478,7 +2478,7 @@
           <a:p>
             <a:r>
               <a:rPr lang="en-US" dirty="0"/>
-              <a:t/>
+              <a:t>Six parts: background, the incident and taxonomy, the layered fix, trust mechanisms, engineering lessons, and results.</a:t>
             </a:r>
             <a:endParaRPr lang="en-US" dirty="0"/>
           </a:p>
@@ -2566,7 +2566,7 @@
           <a:p>
             <a:r>
               <a:rPr lang="en-US" dirty="0"/>
-              <a:t/>
+              <a:t>Two real bugs taught the maxim: a healthy score isn't correct behavior — verify the feature, not just the score.</a:t>
             </a:r>
             <a:endParaRPr lang="en-US" dirty="0"/>
           </a:p>
@@ -2654,7 +2654,7 @@
           <a:p>
             <a:r>
               <a:rPr lang="en-US" dirty="0"/>
-              <a:t/>
+              <a:t>After L1 wiring, LLM calls per task dropped, tool-calling crashes went to zero, and coverage stabilized.</a:t>
             </a:r>
             <a:endParaRPr lang="en-US" dirty="0"/>
           </a:p>
@@ -2742,7 +2742,7 @@
           <a:p>
             <a:r>
               <a:rPr lang="en-US" dirty="0"/>
-              <a:t/>
+              <a:t>The full taxonomy is done; close with takeaways on safe evolution, trust mechanisms, and reading the source.</a:t>
             </a:r>
             <a:endParaRPr lang="en-US" dirty="0"/>
           </a:p>
@@ -2830,7 +2830,7 @@
           <a:p>
             <a:r>
               <a:rPr lang="en-US" dirty="0"/>
-              <a:t/>
+              <a:t>Wrap up and point to the repo and design notes for the full record.</a:t>
             </a:r>
             <a:endParaRPr lang="en-US" dirty="0"/>
           </a:p>
@@ -2918,7 +2918,7 @@
           <a:p>
             <a:r>
               <a:rPr lang="en-US" dirty="0"/>
-              <a:t/>
+              <a:t>Track 1 predicts a user's stars and review; fitness blends rating accuracy and text similarity, which often trade off.</a:t>
             </a:r>
             <a:endParaRPr lang="en-US" dirty="0"/>
           </a:p>
@@ -3006,7 +3006,7 @@
           <a:p>
             <a:r>
               <a:rPr lang="en-US" dirty="0"/>
-              <a:t/>
+              <a:t>Three CrewAI agents run sequentially; OpenEvolve's job is to optimize every facet of this pipeline, not just prompt text.</a:t>
             </a:r>
             <a:endParaRPr lang="en-US" dirty="0"/>
           </a:p>
@@ -3094,7 +3094,7 @@
           <a:p>
             <a:r>
               <a:rPr lang="en-US" dirty="0"/>
-              <a:t/>
+              <a:t>OpenEvolve mutates, scores and selects programs with an LLM — the core question is letting it design itself without breaking itself.</a:t>
             </a:r>
             <a:endParaRPr lang="en-US" dirty="0"/>
           </a:p>
@@ -3182,7 +3182,7 @@
           <a:p>
             <a:r>
               <a:rPr lang="en-US" dirty="0"/>
-              <a:t/>
+              <a:t>We mapped ten optimization directions; today follows the deterministic-retrieval thread, all under one constraint: rate limits.</a:t>
             </a:r>
             <a:endParaRPr lang="en-US" dirty="0"/>
           </a:p>
@@ -3270,7 +3270,7 @@
           <a:p>
             <a:r>
               <a:rPr lang="en-US" dirty="0"/>
-              <a:t/>
+              <a:t>An earlier run repeatedly crashed to the 0.35 floor whenever a prompt mutation broke tool calling.</a:t>
             </a:r>
             <a:endParaRPr lang="en-US" dirty="0"/>
           </a:p>
@@ -3358,7 +3358,7 @@
           <a:p>
             <a:r>
               <a:rPr lang="en-US" dirty="0"/>
-              <a:t/>
+              <a:t>Sort how tool calling can break into five failure modes, one to five — this is the backbone of the whole talk.</a:t>
             </a:r>
             <a:endParaRPr lang="en-US" dirty="0"/>
           </a:p>
@@ -3446,7 +3446,7 @@
           <a:p>
             <a:r>
               <a:rPr lang="en-US" dirty="0"/>
-              <a:t/>
+              <a:t>The key insight: fitness tells you it broke, not where it broke — a single scalar can't do credit assignment.</a:t>
             </a:r>
             <a:endParaRPr lang="en-US" dirty="0"/>
           </a:p>
@@ -3821,7 +3821,7 @@
       </p:grpSpPr>
       <p:sp>
         <p:nvSpPr>
-          <p:cNvPr id="2" name="Shape 0"/>
+          <p:cNvPr id="3" name="Shape 0"/>
           <p:cNvSpPr/>
           <p:nvPr/>
         </p:nvSpPr>
@@ -3841,7 +3841,7 @@
       </p:sp>
       <p:sp>
         <p:nvSpPr>
-          <p:cNvPr id="3" name="Text 1"/>
+          <p:cNvPr id="4" name="Text 1"/>
           <p:cNvSpPr/>
           <p:nvPr/>
         </p:nvSpPr>
@@ -3880,7 +3880,7 @@
       </p:sp>
       <p:sp>
         <p:nvSpPr>
-          <p:cNvPr id="4" name="Text 2"/>
+          <p:cNvPr id="5" name="Text 2"/>
           <p:cNvSpPr/>
           <p:nvPr/>
         </p:nvSpPr>
@@ -3942,7 +3942,7 @@
       </p:sp>
       <p:sp>
         <p:nvSpPr>
-          <p:cNvPr id="5" name="Text 3"/>
+          <p:cNvPr id="6" name="Text 3"/>
           <p:cNvSpPr/>
           <p:nvPr/>
         </p:nvSpPr>
@@ -3981,7 +3981,7 @@
       </p:sp>
       <p:sp>
         <p:nvSpPr>
-          <p:cNvPr id="6" name="Text 4"/>
+          <p:cNvPr id="7" name="Text 4"/>
           <p:cNvSpPr/>
           <p:nvPr/>
         </p:nvSpPr>
@@ -4020,7 +4020,7 @@
       </p:sp>
       <p:sp>
         <p:nvSpPr>
-          <p:cNvPr id="7" name="Text 5"/>
+          <p:cNvPr id="8" name="Text 5"/>
           <p:cNvSpPr/>
           <p:nvPr/>
         </p:nvSpPr>
@@ -4196,7 +4196,7 @@
       </p:grpSpPr>
       <p:sp>
         <p:nvSpPr>
-          <p:cNvPr id="2" name="Shape 0"/>
+          <p:cNvPr id="3" name="Shape 0"/>
           <p:cNvSpPr/>
           <p:nvPr/>
         </p:nvSpPr>
@@ -4216,7 +4216,7 @@
       </p:sp>
       <p:sp>
         <p:nvSpPr>
-          <p:cNvPr id="3" name="Text 1"/>
+          <p:cNvPr id="4" name="Text 1"/>
           <p:cNvSpPr/>
           <p:nvPr/>
         </p:nvSpPr>
@@ -4255,7 +4255,7 @@
       </p:sp>
       <p:sp>
         <p:nvSpPr>
-          <p:cNvPr id="4" name="Text 2"/>
+          <p:cNvPr id="5" name="Text 2"/>
           <p:cNvSpPr/>
           <p:nvPr/>
         </p:nvSpPr>
@@ -4294,7 +4294,7 @@
       </p:sp>
       <p:sp>
         <p:nvSpPr>
-          <p:cNvPr id="5" name="Shape 3"/>
+          <p:cNvPr id="6" name="Shape 3"/>
           <p:cNvSpPr/>
           <p:nvPr/>
         </p:nvSpPr>
@@ -4326,7 +4326,7 @@
       </p:sp>
       <p:sp>
         <p:nvSpPr>
-          <p:cNvPr id="6" name="Shape 4"/>
+          <p:cNvPr id="7" name="Shape 4"/>
           <p:cNvSpPr/>
           <p:nvPr/>
         </p:nvSpPr>
@@ -4346,7 +4346,7 @@
       </p:sp>
       <p:sp>
         <p:nvSpPr>
-          <p:cNvPr id="7" name="Text 5"/>
+          <p:cNvPr id="8" name="Text 5"/>
           <p:cNvSpPr/>
           <p:nvPr/>
         </p:nvSpPr>
@@ -4385,7 +4385,7 @@
       </p:sp>
       <p:sp>
         <p:nvSpPr>
-          <p:cNvPr id="8" name="Text 6"/>
+          <p:cNvPr id="9" name="Text 6"/>
           <p:cNvSpPr/>
           <p:nvPr/>
         </p:nvSpPr>
@@ -4424,7 +4424,7 @@
       </p:sp>
       <p:sp>
         <p:nvSpPr>
-          <p:cNvPr id="9" name="Shape 7"/>
+          <p:cNvPr id="10" name="Shape 7"/>
           <p:cNvSpPr/>
           <p:nvPr/>
         </p:nvSpPr>
@@ -4456,7 +4456,7 @@
       </p:sp>
       <p:sp>
         <p:nvSpPr>
-          <p:cNvPr id="10" name="Shape 8"/>
+          <p:cNvPr id="11" name="Shape 8"/>
           <p:cNvSpPr/>
           <p:nvPr/>
         </p:nvSpPr>
@@ -4476,7 +4476,7 @@
       </p:sp>
       <p:sp>
         <p:nvSpPr>
-          <p:cNvPr id="11" name="Text 9"/>
+          <p:cNvPr id="12" name="Text 9"/>
           <p:cNvSpPr/>
           <p:nvPr/>
         </p:nvSpPr>
@@ -4515,7 +4515,7 @@
       </p:sp>
       <p:sp>
         <p:nvSpPr>
-          <p:cNvPr id="12" name="Text 10"/>
+          <p:cNvPr id="13" name="Text 10"/>
           <p:cNvSpPr/>
           <p:nvPr/>
         </p:nvSpPr>
@@ -4554,7 +4554,7 @@
       </p:sp>
       <p:sp>
         <p:nvSpPr>
-          <p:cNvPr id="13" name="Text 11"/>
+          <p:cNvPr id="14" name="Text 11"/>
           <p:cNvSpPr/>
           <p:nvPr/>
         </p:nvSpPr>
@@ -4607,7 +4607,7 @@
       </p:sp>
       <p:sp>
         <p:nvSpPr>
-          <p:cNvPr id="14" name="Text 12"/>
+          <p:cNvPr id="15" name="Text 12"/>
           <p:cNvSpPr/>
           <p:nvPr/>
         </p:nvSpPr>
@@ -4762,7 +4762,7 @@
       </p:grpSpPr>
       <p:sp>
         <p:nvSpPr>
-          <p:cNvPr id="2" name="Shape 0"/>
+          <p:cNvPr id="3" name="Shape 0"/>
           <p:cNvSpPr/>
           <p:nvPr/>
         </p:nvSpPr>
@@ -4782,7 +4782,7 @@
       </p:sp>
       <p:sp>
         <p:nvSpPr>
-          <p:cNvPr id="3" name="Text 1"/>
+          <p:cNvPr id="4" name="Text 1"/>
           <p:cNvSpPr/>
           <p:nvPr/>
         </p:nvSpPr>
@@ -4821,7 +4821,7 @@
       </p:sp>
       <p:sp>
         <p:nvSpPr>
-          <p:cNvPr id="4" name="Text 2"/>
+          <p:cNvPr id="5" name="Text 2"/>
           <p:cNvSpPr/>
           <p:nvPr/>
         </p:nvSpPr>
@@ -4860,7 +4860,7 @@
       </p:sp>
       <p:sp>
         <p:nvSpPr>
-          <p:cNvPr id="5" name="Shape 3"/>
+          <p:cNvPr id="6" name="Shape 3"/>
           <p:cNvSpPr/>
           <p:nvPr/>
         </p:nvSpPr>
@@ -4892,7 +4892,7 @@
       </p:sp>
       <p:sp>
         <p:nvSpPr>
-          <p:cNvPr id="6" name="Shape 4"/>
+          <p:cNvPr id="7" name="Shape 4"/>
           <p:cNvSpPr/>
           <p:nvPr/>
         </p:nvSpPr>
@@ -4912,7 +4912,7 @@
       </p:sp>
       <p:sp>
         <p:nvSpPr>
-          <p:cNvPr id="7" name="Text 5"/>
+          <p:cNvPr id="8" name="Text 5"/>
           <p:cNvSpPr/>
           <p:nvPr/>
         </p:nvSpPr>
@@ -4951,7 +4951,7 @@
       </p:sp>
       <p:sp>
         <p:nvSpPr>
-          <p:cNvPr id="8" name="Text 6"/>
+          <p:cNvPr id="9" name="Text 6"/>
           <p:cNvSpPr/>
           <p:nvPr/>
         </p:nvSpPr>
@@ -4990,7 +4990,7 @@
       </p:sp>
       <p:sp>
         <p:nvSpPr>
-          <p:cNvPr id="9" name="Text 7"/>
+          <p:cNvPr id="10" name="Text 7"/>
           <p:cNvSpPr/>
           <p:nvPr/>
         </p:nvSpPr>
@@ -5029,7 +5029,7 @@
       </p:sp>
       <p:sp>
         <p:nvSpPr>
-          <p:cNvPr id="10" name="Text 8"/>
+          <p:cNvPr id="11" name="Text 8"/>
           <p:cNvSpPr/>
           <p:nvPr/>
         </p:nvSpPr>
@@ -5068,7 +5068,7 @@
       </p:sp>
       <p:sp>
         <p:nvSpPr>
-          <p:cNvPr id="11" name="Shape 9"/>
+          <p:cNvPr id="12" name="Shape 9"/>
           <p:cNvSpPr/>
           <p:nvPr/>
         </p:nvSpPr>
@@ -5100,7 +5100,7 @@
       </p:sp>
       <p:sp>
         <p:nvSpPr>
-          <p:cNvPr id="12" name="Shape 10"/>
+          <p:cNvPr id="13" name="Shape 10"/>
           <p:cNvSpPr/>
           <p:nvPr/>
         </p:nvSpPr>
@@ -5120,7 +5120,7 @@
       </p:sp>
       <p:sp>
         <p:nvSpPr>
-          <p:cNvPr id="13" name="Text 11"/>
+          <p:cNvPr id="14" name="Text 11"/>
           <p:cNvSpPr/>
           <p:nvPr/>
         </p:nvSpPr>
@@ -5159,7 +5159,7 @@
       </p:sp>
       <p:sp>
         <p:nvSpPr>
-          <p:cNvPr id="14" name="Text 12"/>
+          <p:cNvPr id="15" name="Text 12"/>
           <p:cNvSpPr/>
           <p:nvPr/>
         </p:nvSpPr>
@@ -5198,7 +5198,7 @@
       </p:sp>
       <p:sp>
         <p:nvSpPr>
-          <p:cNvPr id="15" name="Text 13"/>
+          <p:cNvPr id="16" name="Text 13"/>
           <p:cNvSpPr/>
           <p:nvPr/>
         </p:nvSpPr>
@@ -5237,7 +5237,7 @@
       </p:sp>
       <p:sp>
         <p:nvSpPr>
-          <p:cNvPr id="16" name="Text 14"/>
+          <p:cNvPr id="17" name="Text 14"/>
           <p:cNvSpPr/>
           <p:nvPr/>
         </p:nvSpPr>
@@ -5276,7 +5276,7 @@
       </p:sp>
       <p:sp>
         <p:nvSpPr>
-          <p:cNvPr id="17" name="Shape 15"/>
+          <p:cNvPr id="18" name="Shape 15"/>
           <p:cNvSpPr/>
           <p:nvPr/>
         </p:nvSpPr>
@@ -5308,7 +5308,7 @@
       </p:sp>
       <p:sp>
         <p:nvSpPr>
-          <p:cNvPr id="18" name="Shape 16"/>
+          <p:cNvPr id="19" name="Shape 16"/>
           <p:cNvSpPr/>
           <p:nvPr/>
         </p:nvSpPr>
@@ -5328,7 +5328,7 @@
       </p:sp>
       <p:sp>
         <p:nvSpPr>
-          <p:cNvPr id="19" name="Text 17"/>
+          <p:cNvPr id="20" name="Text 17"/>
           <p:cNvSpPr/>
           <p:nvPr/>
         </p:nvSpPr>
@@ -5367,7 +5367,7 @@
       </p:sp>
       <p:sp>
         <p:nvSpPr>
-          <p:cNvPr id="20" name="Text 18"/>
+          <p:cNvPr id="21" name="Text 18"/>
           <p:cNvSpPr/>
           <p:nvPr/>
         </p:nvSpPr>
@@ -5406,7 +5406,7 @@
       </p:sp>
       <p:sp>
         <p:nvSpPr>
-          <p:cNvPr id="21" name="Text 19"/>
+          <p:cNvPr id="22" name="Text 19"/>
           <p:cNvSpPr/>
           <p:nvPr/>
         </p:nvSpPr>
@@ -5445,7 +5445,7 @@
       </p:sp>
       <p:sp>
         <p:nvSpPr>
-          <p:cNvPr id="22" name="Text 20"/>
+          <p:cNvPr id="23" name="Text 20"/>
           <p:cNvSpPr/>
           <p:nvPr/>
         </p:nvSpPr>
@@ -5484,7 +5484,7 @@
       </p:sp>
       <p:sp>
         <p:nvSpPr>
-          <p:cNvPr id="23" name="Text 21"/>
+          <p:cNvPr id="24" name="Text 21"/>
           <p:cNvSpPr/>
           <p:nvPr/>
         </p:nvSpPr>
@@ -5523,7 +5523,7 @@
       </p:sp>
       <p:sp>
         <p:nvSpPr>
-          <p:cNvPr id="24" name="Text 22"/>
+          <p:cNvPr id="25" name="Text 22"/>
           <p:cNvSpPr/>
           <p:nvPr/>
         </p:nvSpPr>
@@ -5713,7 +5713,7 @@
       </p:grpSpPr>
       <p:sp>
         <p:nvSpPr>
-          <p:cNvPr id="2" name="Shape 0"/>
+          <p:cNvPr id="3" name="Shape 0"/>
           <p:cNvSpPr/>
           <p:nvPr/>
         </p:nvSpPr>
@@ -5733,7 +5733,7 @@
       </p:sp>
       <p:sp>
         <p:nvSpPr>
-          <p:cNvPr id="3" name="Text 1"/>
+          <p:cNvPr id="4" name="Text 1"/>
           <p:cNvSpPr/>
           <p:nvPr/>
         </p:nvSpPr>
@@ -5772,7 +5772,7 @@
       </p:sp>
       <p:sp>
         <p:nvSpPr>
-          <p:cNvPr id="4" name="Text 2"/>
+          <p:cNvPr id="5" name="Text 2"/>
           <p:cNvSpPr/>
           <p:nvPr/>
         </p:nvSpPr>
@@ -5811,7 +5811,7 @@
       </p:sp>
       <p:sp>
         <p:nvSpPr>
-          <p:cNvPr id="5" name="Shape 3"/>
+          <p:cNvPr id="6" name="Shape 3"/>
           <p:cNvSpPr/>
           <p:nvPr/>
         </p:nvSpPr>
@@ -5843,7 +5843,7 @@
       </p:sp>
       <p:sp>
         <p:nvSpPr>
-          <p:cNvPr id="6" name="Text 4"/>
+          <p:cNvPr id="7" name="Text 4"/>
           <p:cNvSpPr/>
           <p:nvPr/>
         </p:nvSpPr>
@@ -5882,7 +5882,7 @@
       </p:sp>
       <p:sp>
         <p:nvSpPr>
-          <p:cNvPr id="7" name="Text 5"/>
+          <p:cNvPr id="8" name="Text 5"/>
           <p:cNvSpPr/>
           <p:nvPr/>
         </p:nvSpPr>
@@ -5975,7 +5975,7 @@
       </p:sp>
       <p:sp>
         <p:nvSpPr>
-          <p:cNvPr id="8" name="Text 6"/>
+          <p:cNvPr id="9" name="Text 6"/>
           <p:cNvSpPr/>
           <p:nvPr/>
         </p:nvSpPr>
@@ -6014,7 +6014,7 @@
       </p:sp>
       <p:sp>
         <p:nvSpPr>
-          <p:cNvPr id="9" name="Shape 7"/>
+          <p:cNvPr id="10" name="Shape 7"/>
           <p:cNvSpPr/>
           <p:nvPr/>
         </p:nvSpPr>
@@ -6046,7 +6046,7 @@
       </p:sp>
       <p:sp>
         <p:nvSpPr>
-          <p:cNvPr id="10" name="Text 8"/>
+          <p:cNvPr id="11" name="Text 8"/>
           <p:cNvSpPr/>
           <p:nvPr/>
         </p:nvSpPr>
@@ -6085,7 +6085,7 @@
       </p:sp>
       <p:sp>
         <p:nvSpPr>
-          <p:cNvPr id="11" name="Text 9"/>
+          <p:cNvPr id="12" name="Text 9"/>
           <p:cNvSpPr/>
           <p:nvPr/>
         </p:nvSpPr>
@@ -6124,7 +6124,7 @@
       </p:sp>
       <p:sp>
         <p:nvSpPr>
-          <p:cNvPr id="12" name="Text 10"/>
+          <p:cNvPr id="13" name="Text 10"/>
           <p:cNvSpPr/>
           <p:nvPr/>
         </p:nvSpPr>
@@ -6177,7 +6177,7 @@
       </p:sp>
       <p:sp>
         <p:nvSpPr>
-          <p:cNvPr id="13" name="Text 11"/>
+          <p:cNvPr id="14" name="Text 11"/>
           <p:cNvSpPr/>
           <p:nvPr/>
         </p:nvSpPr>
@@ -6388,7 +6388,7 @@
       </p:grpSpPr>
       <p:sp>
         <p:nvSpPr>
-          <p:cNvPr id="2" name="Shape 0"/>
+          <p:cNvPr id="3" name="Shape 0"/>
           <p:cNvSpPr/>
           <p:nvPr/>
         </p:nvSpPr>
@@ -6408,7 +6408,7 @@
       </p:sp>
       <p:sp>
         <p:nvSpPr>
-          <p:cNvPr id="3" name="Text 1"/>
+          <p:cNvPr id="4" name="Text 1"/>
           <p:cNvSpPr/>
           <p:nvPr/>
         </p:nvSpPr>
@@ -6447,7 +6447,7 @@
       </p:sp>
       <p:sp>
         <p:nvSpPr>
-          <p:cNvPr id="4" name="Text 2"/>
+          <p:cNvPr id="5" name="Text 2"/>
           <p:cNvSpPr/>
           <p:nvPr/>
         </p:nvSpPr>
@@ -6486,7 +6486,7 @@
       </p:sp>
       <p:sp>
         <p:nvSpPr>
-          <p:cNvPr id="5" name="Text 3"/>
+          <p:cNvPr id="6" name="Text 3"/>
           <p:cNvSpPr/>
           <p:nvPr/>
         </p:nvSpPr>
@@ -6553,7 +6553,7 @@
       </p:sp>
       <p:sp>
         <p:nvSpPr>
-          <p:cNvPr id="6" name="Shape 4"/>
+          <p:cNvPr id="7" name="Shape 4"/>
           <p:cNvSpPr/>
           <p:nvPr/>
         </p:nvSpPr>
@@ -6585,7 +6585,7 @@
       </p:sp>
       <p:sp>
         <p:nvSpPr>
-          <p:cNvPr id="7" name="Text 5"/>
+          <p:cNvPr id="8" name="Text 5"/>
           <p:cNvSpPr/>
           <p:nvPr/>
         </p:nvSpPr>
@@ -6747,7 +6747,7 @@
       </p:sp>
       <p:sp>
         <p:nvSpPr>
-          <p:cNvPr id="8" name="Shape 6"/>
+          <p:cNvPr id="9" name="Shape 6"/>
           <p:cNvSpPr/>
           <p:nvPr/>
         </p:nvSpPr>
@@ -6779,7 +6779,7 @@
       </p:sp>
       <p:sp>
         <p:nvSpPr>
-          <p:cNvPr id="9" name="Text 7"/>
+          <p:cNvPr id="10" name="Text 7"/>
           <p:cNvSpPr/>
           <p:nvPr/>
         </p:nvSpPr>
@@ -6818,7 +6818,7 @@
       </p:sp>
       <p:sp>
         <p:nvSpPr>
-          <p:cNvPr id="10" name="Text 8"/>
+          <p:cNvPr id="11" name="Text 8"/>
           <p:cNvSpPr/>
           <p:nvPr/>
         </p:nvSpPr>
@@ -6905,7 +6905,7 @@
       </p:sp>
       <p:sp>
         <p:nvSpPr>
-          <p:cNvPr id="11" name="Text 9"/>
+          <p:cNvPr id="12" name="Text 9"/>
           <p:cNvSpPr/>
           <p:nvPr/>
         </p:nvSpPr>
@@ -6944,7 +6944,7 @@
       </p:sp>
       <p:sp>
         <p:nvSpPr>
-          <p:cNvPr id="12" name="Text 10"/>
+          <p:cNvPr id="13" name="Text 10"/>
           <p:cNvSpPr/>
           <p:nvPr/>
         </p:nvSpPr>
@@ -7155,7 +7155,7 @@
       </p:grpSpPr>
       <p:sp>
         <p:nvSpPr>
-          <p:cNvPr id="2" name="Shape 0"/>
+          <p:cNvPr id="3" name="Shape 0"/>
           <p:cNvSpPr/>
           <p:nvPr/>
         </p:nvSpPr>
@@ -7175,7 +7175,7 @@
       </p:sp>
       <p:sp>
         <p:nvSpPr>
-          <p:cNvPr id="3" name="Text 1"/>
+          <p:cNvPr id="4" name="Text 1"/>
           <p:cNvSpPr/>
           <p:nvPr/>
         </p:nvSpPr>
@@ -7214,7 +7214,7 @@
       </p:sp>
       <p:sp>
         <p:nvSpPr>
-          <p:cNvPr id="4" name="Text 2"/>
+          <p:cNvPr id="5" name="Text 2"/>
           <p:cNvSpPr/>
           <p:nvPr/>
         </p:nvSpPr>
@@ -7253,7 +7253,7 @@
       </p:sp>
       <p:sp>
         <p:nvSpPr>
-          <p:cNvPr id="5" name="Shape 3"/>
+          <p:cNvPr id="6" name="Shape 3"/>
           <p:cNvSpPr/>
           <p:nvPr/>
         </p:nvSpPr>
@@ -7285,7 +7285,7 @@
       </p:sp>
       <p:sp>
         <p:nvSpPr>
-          <p:cNvPr id="6" name="Text 4"/>
+          <p:cNvPr id="7" name="Text 4"/>
           <p:cNvSpPr/>
           <p:nvPr/>
         </p:nvSpPr>
@@ -7375,7 +7375,7 @@
       </p:sp>
       <p:sp>
         <p:nvSpPr>
-          <p:cNvPr id="7" name="Text 5"/>
+          <p:cNvPr id="8" name="Text 5"/>
           <p:cNvSpPr/>
           <p:nvPr/>
         </p:nvSpPr>
@@ -7414,7 +7414,7 @@
       </p:sp>
       <p:sp>
         <p:nvSpPr>
-          <p:cNvPr id="8" name="Text 6"/>
+          <p:cNvPr id="9" name="Text 6"/>
           <p:cNvSpPr/>
           <p:nvPr/>
         </p:nvSpPr>
@@ -7467,7 +7467,7 @@
       </p:sp>
       <p:sp>
         <p:nvSpPr>
-          <p:cNvPr id="9" name="Text 7"/>
+          <p:cNvPr id="10" name="Text 7"/>
           <p:cNvSpPr/>
           <p:nvPr/>
         </p:nvSpPr>
@@ -7643,7 +7643,7 @@
       </p:grpSpPr>
       <p:sp>
         <p:nvSpPr>
-          <p:cNvPr id="2" name="Shape 0"/>
+          <p:cNvPr id="3" name="Shape 0"/>
           <p:cNvSpPr/>
           <p:nvPr/>
         </p:nvSpPr>
@@ -7663,7 +7663,7 @@
       </p:sp>
       <p:sp>
         <p:nvSpPr>
-          <p:cNvPr id="3" name="Text 1"/>
+          <p:cNvPr id="4" name="Text 1"/>
           <p:cNvSpPr/>
           <p:nvPr/>
         </p:nvSpPr>
@@ -7702,7 +7702,7 @@
       </p:sp>
       <p:sp>
         <p:nvSpPr>
-          <p:cNvPr id="4" name="Text 2"/>
+          <p:cNvPr id="5" name="Text 2"/>
           <p:cNvSpPr/>
           <p:nvPr/>
         </p:nvSpPr>
@@ -7741,7 +7741,7 @@
       </p:sp>
       <p:sp>
         <p:nvSpPr>
-          <p:cNvPr id="5" name="Shape 3"/>
+          <p:cNvPr id="6" name="Shape 3"/>
           <p:cNvSpPr/>
           <p:nvPr/>
         </p:nvSpPr>
@@ -7773,7 +7773,7 @@
       </p:sp>
       <p:sp>
         <p:nvSpPr>
-          <p:cNvPr id="6" name="Text 4"/>
+          <p:cNvPr id="7" name="Text 4"/>
           <p:cNvSpPr/>
           <p:nvPr/>
         </p:nvSpPr>
@@ -7812,7 +7812,7 @@
       </p:sp>
       <p:sp>
         <p:nvSpPr>
-          <p:cNvPr id="7" name="Text 5"/>
+          <p:cNvPr id="8" name="Text 5"/>
           <p:cNvSpPr/>
           <p:nvPr/>
         </p:nvSpPr>
@@ -7888,7 +7888,7 @@
       </p:sp>
       <p:sp>
         <p:nvSpPr>
-          <p:cNvPr id="8" name="Text 6"/>
+          <p:cNvPr id="9" name="Text 6"/>
           <p:cNvSpPr/>
           <p:nvPr/>
         </p:nvSpPr>
@@ -7927,7 +7927,7 @@
       </p:sp>
       <p:sp>
         <p:nvSpPr>
-          <p:cNvPr id="9" name="Shape 7"/>
+          <p:cNvPr id="10" name="Shape 7"/>
           <p:cNvSpPr/>
           <p:nvPr/>
         </p:nvSpPr>
@@ -7959,7 +7959,7 @@
       </p:sp>
       <p:sp>
         <p:nvSpPr>
-          <p:cNvPr id="10" name="Text 8"/>
+          <p:cNvPr id="11" name="Text 8"/>
           <p:cNvSpPr/>
           <p:nvPr/>
         </p:nvSpPr>
@@ -7998,7 +7998,7 @@
       </p:sp>
       <p:sp>
         <p:nvSpPr>
-          <p:cNvPr id="11" name="Text 9"/>
+          <p:cNvPr id="12" name="Text 9"/>
           <p:cNvSpPr/>
           <p:nvPr/>
         </p:nvSpPr>
@@ -8091,7 +8091,7 @@
       </p:sp>
       <p:sp>
         <p:nvSpPr>
-          <p:cNvPr id="12" name="Text 10"/>
+          <p:cNvPr id="13" name="Text 10"/>
           <p:cNvSpPr/>
           <p:nvPr/>
         </p:nvSpPr>
@@ -8130,7 +8130,7 @@
       </p:sp>
       <p:sp>
         <p:nvSpPr>
-          <p:cNvPr id="13" name="Text 11"/>
+          <p:cNvPr id="14" name="Text 11"/>
           <p:cNvSpPr/>
           <p:nvPr/>
         </p:nvSpPr>
@@ -8271,7 +8271,7 @@
       </p:grpSpPr>
       <p:sp>
         <p:nvSpPr>
-          <p:cNvPr id="2" name="Shape 0"/>
+          <p:cNvPr id="3" name="Shape 0"/>
           <p:cNvSpPr/>
           <p:nvPr/>
         </p:nvSpPr>
@@ -8291,7 +8291,7 @@
       </p:sp>
       <p:sp>
         <p:nvSpPr>
-          <p:cNvPr id="3" name="Text 1"/>
+          <p:cNvPr id="4" name="Text 1"/>
           <p:cNvSpPr/>
           <p:nvPr/>
         </p:nvSpPr>
@@ -8330,7 +8330,7 @@
       </p:sp>
       <p:sp>
         <p:nvSpPr>
-          <p:cNvPr id="4" name="Text 2"/>
+          <p:cNvPr id="5" name="Text 2"/>
           <p:cNvSpPr/>
           <p:nvPr/>
         </p:nvSpPr>
@@ -8369,7 +8369,7 @@
       </p:sp>
       <p:sp>
         <p:nvSpPr>
-          <p:cNvPr id="5" name="Text 3"/>
+          <p:cNvPr id="6" name="Text 3"/>
           <p:cNvSpPr/>
           <p:nvPr/>
         </p:nvSpPr>
@@ -8408,7 +8408,7 @@
       </p:sp>
       <p:sp>
         <p:nvSpPr>
-          <p:cNvPr id="6" name="Shape 4"/>
+          <p:cNvPr id="7" name="Shape 4"/>
           <p:cNvSpPr/>
           <p:nvPr/>
         </p:nvSpPr>
@@ -8440,7 +8440,7 @@
       </p:sp>
       <p:sp>
         <p:nvSpPr>
-          <p:cNvPr id="7" name="Shape 5"/>
+          <p:cNvPr id="8" name="Shape 5"/>
           <p:cNvSpPr/>
           <p:nvPr/>
         </p:nvSpPr>
@@ -8460,7 +8460,7 @@
       </p:sp>
       <p:sp>
         <p:nvSpPr>
-          <p:cNvPr id="8" name="Text 6"/>
+          <p:cNvPr id="9" name="Text 6"/>
           <p:cNvSpPr/>
           <p:nvPr/>
         </p:nvSpPr>
@@ -8499,7 +8499,7 @@
       </p:sp>
       <p:sp>
         <p:nvSpPr>
-          <p:cNvPr id="9" name="Text 7"/>
+          <p:cNvPr id="10" name="Text 7"/>
           <p:cNvSpPr/>
           <p:nvPr/>
         </p:nvSpPr>
@@ -8538,7 +8538,7 @@
       </p:sp>
       <p:sp>
         <p:nvSpPr>
-          <p:cNvPr id="10" name="Text 8"/>
+          <p:cNvPr id="11" name="Text 8"/>
           <p:cNvSpPr/>
           <p:nvPr/>
         </p:nvSpPr>
@@ -8577,7 +8577,7 @@
       </p:sp>
       <p:sp>
         <p:nvSpPr>
-          <p:cNvPr id="11" name="Shape 9"/>
+          <p:cNvPr id="12" name="Shape 9"/>
           <p:cNvSpPr/>
           <p:nvPr/>
         </p:nvSpPr>
@@ -8609,7 +8609,7 @@
       </p:sp>
       <p:sp>
         <p:nvSpPr>
-          <p:cNvPr id="12" name="Shape 10"/>
+          <p:cNvPr id="13" name="Shape 10"/>
           <p:cNvSpPr/>
           <p:nvPr/>
         </p:nvSpPr>
@@ -8629,7 +8629,7 @@
       </p:sp>
       <p:sp>
         <p:nvSpPr>
-          <p:cNvPr id="13" name="Text 11"/>
+          <p:cNvPr id="14" name="Text 11"/>
           <p:cNvSpPr/>
           <p:nvPr/>
         </p:nvSpPr>
@@ -8668,7 +8668,7 @@
       </p:sp>
       <p:sp>
         <p:nvSpPr>
-          <p:cNvPr id="14" name="Text 12"/>
+          <p:cNvPr id="15" name="Text 12"/>
           <p:cNvSpPr/>
           <p:nvPr/>
         </p:nvSpPr>
@@ -8707,7 +8707,7 @@
       </p:sp>
       <p:sp>
         <p:nvSpPr>
-          <p:cNvPr id="15" name="Text 13"/>
+          <p:cNvPr id="16" name="Text 13"/>
           <p:cNvSpPr/>
           <p:nvPr/>
         </p:nvSpPr>
@@ -8746,7 +8746,7 @@
       </p:sp>
       <p:sp>
         <p:nvSpPr>
-          <p:cNvPr id="16" name="Shape 14"/>
+          <p:cNvPr id="17" name="Shape 14"/>
           <p:cNvSpPr/>
           <p:nvPr/>
         </p:nvSpPr>
@@ -8778,7 +8778,7 @@
       </p:sp>
       <p:sp>
         <p:nvSpPr>
-          <p:cNvPr id="17" name="Shape 15"/>
+          <p:cNvPr id="18" name="Shape 15"/>
           <p:cNvSpPr/>
           <p:nvPr/>
         </p:nvSpPr>
@@ -8798,7 +8798,7 @@
       </p:sp>
       <p:sp>
         <p:nvSpPr>
-          <p:cNvPr id="18" name="Text 16"/>
+          <p:cNvPr id="19" name="Text 16"/>
           <p:cNvSpPr/>
           <p:nvPr/>
         </p:nvSpPr>
@@ -8837,7 +8837,7 @@
       </p:sp>
       <p:sp>
         <p:nvSpPr>
-          <p:cNvPr id="19" name="Text 17"/>
+          <p:cNvPr id="20" name="Text 17"/>
           <p:cNvSpPr/>
           <p:nvPr/>
         </p:nvSpPr>
@@ -8876,7 +8876,7 @@
       </p:sp>
       <p:sp>
         <p:nvSpPr>
-          <p:cNvPr id="20" name="Text 18"/>
+          <p:cNvPr id="21" name="Text 18"/>
           <p:cNvSpPr/>
           <p:nvPr/>
         </p:nvSpPr>
@@ -8915,7 +8915,7 @@
       </p:sp>
       <p:sp>
         <p:nvSpPr>
-          <p:cNvPr id="21" name="Shape 19"/>
+          <p:cNvPr id="22" name="Shape 19"/>
           <p:cNvSpPr/>
           <p:nvPr/>
         </p:nvSpPr>
@@ -8947,7 +8947,7 @@
       </p:sp>
       <p:sp>
         <p:nvSpPr>
-          <p:cNvPr id="22" name="Shape 20"/>
+          <p:cNvPr id="23" name="Shape 20"/>
           <p:cNvSpPr/>
           <p:nvPr/>
         </p:nvSpPr>
@@ -8967,7 +8967,7 @@
       </p:sp>
       <p:sp>
         <p:nvSpPr>
-          <p:cNvPr id="23" name="Text 21"/>
+          <p:cNvPr id="24" name="Text 21"/>
           <p:cNvSpPr/>
           <p:nvPr/>
         </p:nvSpPr>
@@ -9006,7 +9006,7 @@
       </p:sp>
       <p:sp>
         <p:nvSpPr>
-          <p:cNvPr id="24" name="Text 22"/>
+          <p:cNvPr id="25" name="Text 22"/>
           <p:cNvSpPr/>
           <p:nvPr/>
         </p:nvSpPr>
@@ -9045,7 +9045,7 @@
       </p:sp>
       <p:sp>
         <p:nvSpPr>
-          <p:cNvPr id="25" name="Text 23"/>
+          <p:cNvPr id="26" name="Text 23"/>
           <p:cNvSpPr/>
           <p:nvPr/>
         </p:nvSpPr>
@@ -9084,7 +9084,7 @@
       </p:sp>
       <p:sp>
         <p:nvSpPr>
-          <p:cNvPr id="26" name="Text 24"/>
+          <p:cNvPr id="27" name="Text 24"/>
           <p:cNvSpPr/>
           <p:nvPr/>
         </p:nvSpPr>
@@ -9137,7 +9137,7 @@
       </p:sp>
       <p:sp>
         <p:nvSpPr>
-          <p:cNvPr id="27" name="Text 25"/>
+          <p:cNvPr id="28" name="Text 25"/>
           <p:cNvSpPr/>
           <p:nvPr/>
         </p:nvSpPr>
@@ -9383,7 +9383,7 @@
       </p:grpSpPr>
       <p:sp>
         <p:nvSpPr>
-          <p:cNvPr id="2" name="Shape 0"/>
+          <p:cNvPr id="3" name="Shape 0"/>
           <p:cNvSpPr/>
           <p:nvPr/>
         </p:nvSpPr>
@@ -9403,7 +9403,7 @@
       </p:sp>
       <p:sp>
         <p:nvSpPr>
-          <p:cNvPr id="3" name="Text 1"/>
+          <p:cNvPr id="4" name="Text 1"/>
           <p:cNvSpPr/>
           <p:nvPr/>
         </p:nvSpPr>
@@ -9442,7 +9442,7 @@
       </p:sp>
       <p:sp>
         <p:nvSpPr>
-          <p:cNvPr id="4" name="Text 2"/>
+          <p:cNvPr id="5" name="Text 2"/>
           <p:cNvSpPr/>
           <p:nvPr/>
         </p:nvSpPr>
@@ -9481,7 +9481,7 @@
       </p:sp>
       <p:sp>
         <p:nvSpPr>
-          <p:cNvPr id="5" name="Shape 3"/>
+          <p:cNvPr id="6" name="Shape 3"/>
           <p:cNvSpPr/>
           <p:nvPr/>
         </p:nvSpPr>
@@ -9513,7 +9513,7 @@
       </p:sp>
       <p:sp>
         <p:nvSpPr>
-          <p:cNvPr id="6" name="Text 4"/>
+          <p:cNvPr id="7" name="Text 4"/>
           <p:cNvSpPr/>
           <p:nvPr/>
         </p:nvSpPr>
@@ -9552,7 +9552,7 @@
       </p:sp>
       <p:sp>
         <p:nvSpPr>
-          <p:cNvPr id="7" name="Text 5"/>
+          <p:cNvPr id="8" name="Text 5"/>
           <p:cNvSpPr/>
           <p:nvPr/>
         </p:nvSpPr>
@@ -9679,7 +9679,7 @@
       </p:sp>
       <p:sp>
         <p:nvSpPr>
-          <p:cNvPr id="8" name="Text 6"/>
+          <p:cNvPr id="9" name="Text 6"/>
           <p:cNvSpPr/>
           <p:nvPr/>
         </p:nvSpPr>
@@ -9718,7 +9718,7 @@
       </p:sp>
       <p:sp>
         <p:nvSpPr>
-          <p:cNvPr id="9" name="Shape 7"/>
+          <p:cNvPr id="10" name="Shape 7"/>
           <p:cNvSpPr/>
           <p:nvPr/>
         </p:nvSpPr>
@@ -9750,7 +9750,7 @@
       </p:sp>
       <p:sp>
         <p:nvSpPr>
-          <p:cNvPr id="10" name="Text 8"/>
+          <p:cNvPr id="11" name="Text 8"/>
           <p:cNvSpPr/>
           <p:nvPr/>
         </p:nvSpPr>
@@ -9789,7 +9789,7 @@
       </p:sp>
       <p:sp>
         <p:nvSpPr>
-          <p:cNvPr id="11" name="Text 9"/>
+          <p:cNvPr id="12" name="Text 9"/>
           <p:cNvSpPr/>
           <p:nvPr/>
         </p:nvSpPr>
@@ -9845,7 +9845,7 @@
       </p:sp>
       <p:sp>
         <p:nvSpPr>
-          <p:cNvPr id="12" name="Text 10"/>
+          <p:cNvPr id="13" name="Text 10"/>
           <p:cNvSpPr/>
           <p:nvPr/>
         </p:nvSpPr>
@@ -9907,7 +9907,7 @@
       </p:sp>
       <p:sp>
         <p:nvSpPr>
-          <p:cNvPr id="13" name="Text 11"/>
+          <p:cNvPr id="14" name="Text 11"/>
           <p:cNvSpPr/>
           <p:nvPr/>
         </p:nvSpPr>
@@ -10048,7 +10048,7 @@
       </p:grpSpPr>
       <p:sp>
         <p:nvSpPr>
-          <p:cNvPr id="2" name="Shape 0"/>
+          <p:cNvPr id="3" name="Shape 0"/>
           <p:cNvSpPr/>
           <p:nvPr/>
         </p:nvSpPr>
@@ -10068,7 +10068,7 @@
       </p:sp>
       <p:sp>
         <p:nvSpPr>
-          <p:cNvPr id="3" name="Text 1"/>
+          <p:cNvPr id="4" name="Text 1"/>
           <p:cNvSpPr/>
           <p:nvPr/>
         </p:nvSpPr>
@@ -10107,7 +10107,7 @@
       </p:sp>
       <p:sp>
         <p:nvSpPr>
-          <p:cNvPr id="4" name="Text 2"/>
+          <p:cNvPr id="5" name="Text 2"/>
           <p:cNvSpPr/>
           <p:nvPr/>
         </p:nvSpPr>
@@ -10146,7 +10146,7 @@
       </p:sp>
       <p:sp>
         <p:nvSpPr>
-          <p:cNvPr id="5" name="Text 3"/>
+          <p:cNvPr id="6" name="Text 3"/>
           <p:cNvSpPr/>
           <p:nvPr/>
         </p:nvSpPr>
@@ -10185,7 +10185,7 @@
       </p:sp>
       <p:sp>
         <p:nvSpPr>
-          <p:cNvPr id="6" name="Shape 4"/>
+          <p:cNvPr id="7" name="Shape 4"/>
           <p:cNvSpPr/>
           <p:nvPr/>
         </p:nvSpPr>
@@ -10217,7 +10217,7 @@
       </p:sp>
       <p:sp>
         <p:nvSpPr>
-          <p:cNvPr id="7" name="Text 5"/>
+          <p:cNvPr id="8" name="Text 5"/>
           <p:cNvSpPr/>
           <p:nvPr/>
         </p:nvSpPr>
@@ -10256,7 +10256,7 @@
       </p:sp>
       <p:sp>
         <p:nvSpPr>
-          <p:cNvPr id="8" name="Text 6"/>
+          <p:cNvPr id="9" name="Text 6"/>
           <p:cNvSpPr/>
           <p:nvPr/>
         </p:nvSpPr>
@@ -10335,7 +10335,7 @@
       </p:sp>
       <p:sp>
         <p:nvSpPr>
-          <p:cNvPr id="9" name="Shape 7"/>
+          <p:cNvPr id="10" name="Shape 7"/>
           <p:cNvSpPr/>
           <p:nvPr/>
         </p:nvSpPr>
@@ -10367,7 +10367,7 @@
       </p:sp>
       <p:sp>
         <p:nvSpPr>
-          <p:cNvPr id="10" name="Text 8"/>
+          <p:cNvPr id="11" name="Text 8"/>
           <p:cNvSpPr/>
           <p:nvPr/>
         </p:nvSpPr>
@@ -10406,7 +10406,7 @@
       </p:sp>
       <p:sp>
         <p:nvSpPr>
-          <p:cNvPr id="11" name="Text 9"/>
+          <p:cNvPr id="12" name="Text 9"/>
           <p:cNvSpPr/>
           <p:nvPr/>
         </p:nvSpPr>
@@ -10485,7 +10485,7 @@
       </p:sp>
       <p:sp>
         <p:nvSpPr>
-          <p:cNvPr id="12" name="Text 10"/>
+          <p:cNvPr id="13" name="Text 10"/>
           <p:cNvSpPr/>
           <p:nvPr/>
         </p:nvSpPr>
@@ -10524,7 +10524,7 @@
       </p:sp>
       <p:sp>
         <p:nvSpPr>
-          <p:cNvPr id="13" name="Text 11"/>
+          <p:cNvPr id="14" name="Text 11"/>
           <p:cNvSpPr/>
           <p:nvPr/>
         </p:nvSpPr>
@@ -10700,7 +10700,7 @@
       </p:grpSpPr>
       <p:sp>
         <p:nvSpPr>
-          <p:cNvPr id="2" name="Shape 0"/>
+          <p:cNvPr id="3" name="Shape 0"/>
           <p:cNvSpPr/>
           <p:nvPr/>
         </p:nvSpPr>
@@ -10720,7 +10720,7 @@
       </p:sp>
       <p:sp>
         <p:nvSpPr>
-          <p:cNvPr id="3" name="Text 1"/>
+          <p:cNvPr id="4" name="Text 1"/>
           <p:cNvSpPr/>
           <p:nvPr/>
         </p:nvSpPr>
@@ -10759,7 +10759,7 @@
       </p:sp>
       <p:sp>
         <p:nvSpPr>
-          <p:cNvPr id="4" name="Text 2"/>
+          <p:cNvPr id="5" name="Text 2"/>
           <p:cNvSpPr/>
           <p:nvPr/>
         </p:nvSpPr>
@@ -10798,7 +10798,7 @@
       </p:sp>
       <p:sp>
         <p:nvSpPr>
-          <p:cNvPr id="5" name="Text 3"/>
+          <p:cNvPr id="6" name="Text 3"/>
           <p:cNvSpPr/>
           <p:nvPr/>
         </p:nvSpPr>
@@ -10837,7 +10837,7 @@
       </p:sp>
       <p:graphicFrame>
         <p:nvGraphicFramePr>
-          <p:cNvPr id="6" name="Chart 0" descr=""/>
+          <p:cNvPr id="7" name="Chart 0" descr=""/>
           <p:cNvGraphicFramePr/>
           <p:nvPr/>
         </p:nvGraphicFramePr>
@@ -10853,7 +10853,7 @@
       </p:graphicFrame>
       <p:sp>
         <p:nvSpPr>
-          <p:cNvPr id="7" name="Shape 4"/>
+          <p:cNvPr id="8" name="Shape 4"/>
           <p:cNvSpPr/>
           <p:nvPr/>
         </p:nvSpPr>
@@ -10885,7 +10885,7 @@
       </p:sp>
       <p:sp>
         <p:nvSpPr>
-          <p:cNvPr id="8" name="Text 5"/>
+          <p:cNvPr id="9" name="Text 5"/>
           <p:cNvSpPr/>
           <p:nvPr/>
         </p:nvSpPr>
@@ -10924,7 +10924,7 @@
       </p:sp>
       <p:sp>
         <p:nvSpPr>
-          <p:cNvPr id="9" name="Text 6"/>
+          <p:cNvPr id="10" name="Text 6"/>
           <p:cNvSpPr/>
           <p:nvPr/>
         </p:nvSpPr>
@@ -11014,7 +11014,7 @@
       </p:sp>
       <p:sp>
         <p:nvSpPr>
-          <p:cNvPr id="10" name="Text 7"/>
+          <p:cNvPr id="11" name="Text 7"/>
           <p:cNvSpPr/>
           <p:nvPr/>
         </p:nvSpPr>
@@ -11053,7 +11053,7 @@
       </p:sp>
       <p:sp>
         <p:nvSpPr>
-          <p:cNvPr id="11" name="Text 8"/>
+          <p:cNvPr id="12" name="Text 8"/>
           <p:cNvSpPr/>
           <p:nvPr/>
         </p:nvSpPr>
@@ -11215,7 +11215,7 @@
       </p:grpSpPr>
       <p:sp>
         <p:nvSpPr>
-          <p:cNvPr id="2" name="Shape 0"/>
+          <p:cNvPr id="3" name="Shape 0"/>
           <p:cNvSpPr/>
           <p:nvPr/>
         </p:nvSpPr>
@@ -11235,7 +11235,7 @@
       </p:sp>
       <p:sp>
         <p:nvSpPr>
-          <p:cNvPr id="3" name="Text 1"/>
+          <p:cNvPr id="4" name="Text 1"/>
           <p:cNvSpPr/>
           <p:nvPr/>
         </p:nvSpPr>
@@ -11274,7 +11274,7 @@
       </p:sp>
       <p:sp>
         <p:nvSpPr>
-          <p:cNvPr id="4" name="Text 2"/>
+          <p:cNvPr id="5" name="Text 2"/>
           <p:cNvSpPr/>
           <p:nvPr/>
         </p:nvSpPr>
@@ -11313,7 +11313,7 @@
       </p:sp>
       <p:sp>
         <p:nvSpPr>
-          <p:cNvPr id="5" name="Shape 3"/>
+          <p:cNvPr id="6" name="Shape 3"/>
           <p:cNvSpPr/>
           <p:nvPr/>
         </p:nvSpPr>
@@ -11345,7 +11345,7 @@
       </p:sp>
       <p:sp>
         <p:nvSpPr>
-          <p:cNvPr id="6" name="Shape 4"/>
+          <p:cNvPr id="7" name="Shape 4"/>
           <p:cNvSpPr/>
           <p:nvPr/>
         </p:nvSpPr>
@@ -11365,7 +11365,7 @@
       </p:sp>
       <p:sp>
         <p:nvSpPr>
-          <p:cNvPr id="7" name="Text 5"/>
+          <p:cNvPr id="8" name="Text 5"/>
           <p:cNvSpPr/>
           <p:nvPr/>
         </p:nvSpPr>
@@ -11404,7 +11404,7 @@
       </p:sp>
       <p:sp>
         <p:nvSpPr>
-          <p:cNvPr id="8" name="Text 6"/>
+          <p:cNvPr id="9" name="Text 6"/>
           <p:cNvSpPr/>
           <p:nvPr/>
         </p:nvSpPr>
@@ -11443,7 +11443,7 @@
       </p:sp>
       <p:sp>
         <p:nvSpPr>
-          <p:cNvPr id="9" name="Text 7"/>
+          <p:cNvPr id="10" name="Text 7"/>
           <p:cNvSpPr/>
           <p:nvPr/>
         </p:nvSpPr>
@@ -11482,7 +11482,7 @@
       </p:sp>
       <p:sp>
         <p:nvSpPr>
-          <p:cNvPr id="10" name="Shape 8"/>
+          <p:cNvPr id="11" name="Shape 8"/>
           <p:cNvSpPr/>
           <p:nvPr/>
         </p:nvSpPr>
@@ -11514,7 +11514,7 @@
       </p:sp>
       <p:sp>
         <p:nvSpPr>
-          <p:cNvPr id="11" name="Shape 9"/>
+          <p:cNvPr id="12" name="Shape 9"/>
           <p:cNvSpPr/>
           <p:nvPr/>
         </p:nvSpPr>
@@ -11534,7 +11534,7 @@
       </p:sp>
       <p:sp>
         <p:nvSpPr>
-          <p:cNvPr id="12" name="Text 10"/>
+          <p:cNvPr id="13" name="Text 10"/>
           <p:cNvSpPr/>
           <p:nvPr/>
         </p:nvSpPr>
@@ -11573,7 +11573,7 @@
       </p:sp>
       <p:sp>
         <p:nvSpPr>
-          <p:cNvPr id="13" name="Text 11"/>
+          <p:cNvPr id="14" name="Text 11"/>
           <p:cNvSpPr/>
           <p:nvPr/>
         </p:nvSpPr>
@@ -11612,7 +11612,7 @@
       </p:sp>
       <p:sp>
         <p:nvSpPr>
-          <p:cNvPr id="14" name="Text 12"/>
+          <p:cNvPr id="15" name="Text 12"/>
           <p:cNvSpPr/>
           <p:nvPr/>
         </p:nvSpPr>
@@ -11651,7 +11651,7 @@
       </p:sp>
       <p:sp>
         <p:nvSpPr>
-          <p:cNvPr id="15" name="Shape 13"/>
+          <p:cNvPr id="16" name="Shape 13"/>
           <p:cNvSpPr/>
           <p:nvPr/>
         </p:nvSpPr>
@@ -11683,7 +11683,7 @@
       </p:sp>
       <p:sp>
         <p:nvSpPr>
-          <p:cNvPr id="16" name="Shape 14"/>
+          <p:cNvPr id="17" name="Shape 14"/>
           <p:cNvSpPr/>
           <p:nvPr/>
         </p:nvSpPr>
@@ -11703,7 +11703,7 @@
       </p:sp>
       <p:sp>
         <p:nvSpPr>
-          <p:cNvPr id="17" name="Text 15"/>
+          <p:cNvPr id="18" name="Text 15"/>
           <p:cNvSpPr/>
           <p:nvPr/>
         </p:nvSpPr>
@@ -11742,7 +11742,7 @@
       </p:sp>
       <p:sp>
         <p:nvSpPr>
-          <p:cNvPr id="18" name="Text 16"/>
+          <p:cNvPr id="19" name="Text 16"/>
           <p:cNvSpPr/>
           <p:nvPr/>
         </p:nvSpPr>
@@ -11781,7 +11781,7 @@
       </p:sp>
       <p:sp>
         <p:nvSpPr>
-          <p:cNvPr id="19" name="Text 17"/>
+          <p:cNvPr id="20" name="Text 17"/>
           <p:cNvSpPr/>
           <p:nvPr/>
         </p:nvSpPr>
@@ -11820,7 +11820,7 @@
       </p:sp>
       <p:sp>
         <p:nvSpPr>
-          <p:cNvPr id="20" name="Shape 18"/>
+          <p:cNvPr id="21" name="Shape 18"/>
           <p:cNvSpPr/>
           <p:nvPr/>
         </p:nvSpPr>
@@ -11852,7 +11852,7 @@
       </p:sp>
       <p:sp>
         <p:nvSpPr>
-          <p:cNvPr id="21" name="Shape 19"/>
+          <p:cNvPr id="22" name="Shape 19"/>
           <p:cNvSpPr/>
           <p:nvPr/>
         </p:nvSpPr>
@@ -11872,7 +11872,7 @@
       </p:sp>
       <p:sp>
         <p:nvSpPr>
-          <p:cNvPr id="22" name="Text 20"/>
+          <p:cNvPr id="23" name="Text 20"/>
           <p:cNvSpPr/>
           <p:nvPr/>
         </p:nvSpPr>
@@ -11911,7 +11911,7 @@
       </p:sp>
       <p:sp>
         <p:nvSpPr>
-          <p:cNvPr id="23" name="Text 21"/>
+          <p:cNvPr id="24" name="Text 21"/>
           <p:cNvSpPr/>
           <p:nvPr/>
         </p:nvSpPr>
@@ -11950,7 +11950,7 @@
       </p:sp>
       <p:sp>
         <p:nvSpPr>
-          <p:cNvPr id="24" name="Text 22"/>
+          <p:cNvPr id="25" name="Text 22"/>
           <p:cNvSpPr/>
           <p:nvPr/>
         </p:nvSpPr>
@@ -11989,7 +11989,7 @@
       </p:sp>
       <p:sp>
         <p:nvSpPr>
-          <p:cNvPr id="25" name="Shape 23"/>
+          <p:cNvPr id="26" name="Shape 23"/>
           <p:cNvSpPr/>
           <p:nvPr/>
         </p:nvSpPr>
@@ -12021,7 +12021,7 @@
       </p:sp>
       <p:sp>
         <p:nvSpPr>
-          <p:cNvPr id="26" name="Shape 24"/>
+          <p:cNvPr id="27" name="Shape 24"/>
           <p:cNvSpPr/>
           <p:nvPr/>
         </p:nvSpPr>
@@ -12041,7 +12041,7 @@
       </p:sp>
       <p:sp>
         <p:nvSpPr>
-          <p:cNvPr id="27" name="Text 25"/>
+          <p:cNvPr id="28" name="Text 25"/>
           <p:cNvSpPr/>
           <p:nvPr/>
         </p:nvSpPr>
@@ -12080,7 +12080,7 @@
       </p:sp>
       <p:sp>
         <p:nvSpPr>
-          <p:cNvPr id="28" name="Text 26"/>
+          <p:cNvPr id="29" name="Text 26"/>
           <p:cNvSpPr/>
           <p:nvPr/>
         </p:nvSpPr>
@@ -12119,7 +12119,7 @@
       </p:sp>
       <p:sp>
         <p:nvSpPr>
-          <p:cNvPr id="29" name="Text 27"/>
+          <p:cNvPr id="30" name="Text 27"/>
           <p:cNvSpPr/>
           <p:nvPr/>
         </p:nvSpPr>
@@ -12158,7 +12158,7 @@
       </p:sp>
       <p:sp>
         <p:nvSpPr>
-          <p:cNvPr id="30" name="Shape 28"/>
+          <p:cNvPr id="31" name="Shape 28"/>
           <p:cNvSpPr/>
           <p:nvPr/>
         </p:nvSpPr>
@@ -12190,7 +12190,7 @@
       </p:sp>
       <p:sp>
         <p:nvSpPr>
-          <p:cNvPr id="31" name="Shape 29"/>
+          <p:cNvPr id="32" name="Shape 29"/>
           <p:cNvSpPr/>
           <p:nvPr/>
         </p:nvSpPr>
@@ -12210,7 +12210,7 @@
       </p:sp>
       <p:sp>
         <p:nvSpPr>
-          <p:cNvPr id="32" name="Text 30"/>
+          <p:cNvPr id="33" name="Text 30"/>
           <p:cNvSpPr/>
           <p:nvPr/>
         </p:nvSpPr>
@@ -12249,7 +12249,7 @@
       </p:sp>
       <p:sp>
         <p:nvSpPr>
-          <p:cNvPr id="33" name="Text 31"/>
+          <p:cNvPr id="34" name="Text 31"/>
           <p:cNvSpPr/>
           <p:nvPr/>
         </p:nvSpPr>
@@ -12288,7 +12288,7 @@
       </p:sp>
       <p:sp>
         <p:nvSpPr>
-          <p:cNvPr id="34" name="Text 32"/>
+          <p:cNvPr id="35" name="Text 32"/>
           <p:cNvSpPr/>
           <p:nvPr/>
         </p:nvSpPr>
@@ -12327,7 +12327,7 @@
       </p:sp>
       <p:sp>
         <p:nvSpPr>
-          <p:cNvPr id="35" name="Text 33"/>
+          <p:cNvPr id="36" name="Text 33"/>
           <p:cNvSpPr/>
           <p:nvPr/>
         </p:nvSpPr>
@@ -12380,7 +12380,7 @@
       </p:sp>
       <p:sp>
         <p:nvSpPr>
-          <p:cNvPr id="36" name="Text 34"/>
+          <p:cNvPr id="37" name="Text 34"/>
           <p:cNvSpPr/>
           <p:nvPr/>
         </p:nvSpPr>
@@ -12465,7 +12465,7 @@
       </p:grpSpPr>
       <p:sp>
         <p:nvSpPr>
-          <p:cNvPr id="2" name="Shape 0"/>
+          <p:cNvPr id="3" name="Shape 0"/>
           <p:cNvSpPr/>
           <p:nvPr/>
         </p:nvSpPr>
@@ -12485,7 +12485,7 @@
       </p:sp>
       <p:sp>
         <p:nvSpPr>
-          <p:cNvPr id="3" name="Text 1"/>
+          <p:cNvPr id="4" name="Text 1"/>
           <p:cNvSpPr/>
           <p:nvPr/>
         </p:nvSpPr>
@@ -12524,7 +12524,7 @@
       </p:sp>
       <p:sp>
         <p:nvSpPr>
-          <p:cNvPr id="4" name="Text 2"/>
+          <p:cNvPr id="5" name="Text 2"/>
           <p:cNvSpPr/>
           <p:nvPr/>
         </p:nvSpPr>
@@ -12563,7 +12563,7 @@
       </p:sp>
       <p:sp>
         <p:nvSpPr>
-          <p:cNvPr id="5" name="Shape 3"/>
+          <p:cNvPr id="6" name="Shape 3"/>
           <p:cNvSpPr/>
           <p:nvPr/>
         </p:nvSpPr>
@@ -12595,7 +12595,7 @@
       </p:sp>
       <p:sp>
         <p:nvSpPr>
-          <p:cNvPr id="6" name="Text 4"/>
+          <p:cNvPr id="7" name="Text 4"/>
           <p:cNvSpPr/>
           <p:nvPr/>
         </p:nvSpPr>
@@ -12634,7 +12634,7 @@
       </p:sp>
       <p:sp>
         <p:nvSpPr>
-          <p:cNvPr id="7" name="Text 5"/>
+          <p:cNvPr id="8" name="Text 5"/>
           <p:cNvSpPr/>
           <p:nvPr/>
         </p:nvSpPr>
@@ -12673,7 +12673,7 @@
       </p:sp>
       <p:sp>
         <p:nvSpPr>
-          <p:cNvPr id="8" name="Shape 6"/>
+          <p:cNvPr id="9" name="Shape 6"/>
           <p:cNvSpPr/>
           <p:nvPr/>
         </p:nvSpPr>
@@ -12705,7 +12705,7 @@
       </p:sp>
       <p:sp>
         <p:nvSpPr>
-          <p:cNvPr id="9" name="Text 7"/>
+          <p:cNvPr id="10" name="Text 7"/>
           <p:cNvSpPr/>
           <p:nvPr/>
         </p:nvSpPr>
@@ -12744,7 +12744,7 @@
       </p:sp>
       <p:sp>
         <p:nvSpPr>
-          <p:cNvPr id="10" name="Text 8"/>
+          <p:cNvPr id="11" name="Text 8"/>
           <p:cNvSpPr/>
           <p:nvPr/>
         </p:nvSpPr>
@@ -12783,7 +12783,7 @@
       </p:sp>
       <p:sp>
         <p:nvSpPr>
-          <p:cNvPr id="11" name="Shape 9"/>
+          <p:cNvPr id="12" name="Shape 9"/>
           <p:cNvSpPr/>
           <p:nvPr/>
         </p:nvSpPr>
@@ -12815,7 +12815,7 @@
       </p:sp>
       <p:sp>
         <p:nvSpPr>
-          <p:cNvPr id="12" name="Text 10"/>
+          <p:cNvPr id="13" name="Text 10"/>
           <p:cNvSpPr/>
           <p:nvPr/>
         </p:nvSpPr>
@@ -12854,7 +12854,7 @@
       </p:sp>
       <p:sp>
         <p:nvSpPr>
-          <p:cNvPr id="13" name="Text 11"/>
+          <p:cNvPr id="14" name="Text 11"/>
           <p:cNvSpPr/>
           <p:nvPr/>
         </p:nvSpPr>
@@ -12893,7 +12893,7 @@
       </p:sp>
       <p:sp>
         <p:nvSpPr>
-          <p:cNvPr id="14" name="Text 12"/>
+          <p:cNvPr id="15" name="Text 12"/>
           <p:cNvSpPr/>
           <p:nvPr/>
         </p:nvSpPr>
@@ -13069,7 +13069,7 @@
       </p:grpSpPr>
       <p:sp>
         <p:nvSpPr>
-          <p:cNvPr id="2" name="Shape 0"/>
+          <p:cNvPr id="3" name="Shape 0"/>
           <p:cNvSpPr/>
           <p:nvPr/>
         </p:nvSpPr>
@@ -13089,7 +13089,7 @@
       </p:sp>
       <p:sp>
         <p:nvSpPr>
-          <p:cNvPr id="3" name="Text 1"/>
+          <p:cNvPr id="4" name="Text 1"/>
           <p:cNvSpPr/>
           <p:nvPr/>
         </p:nvSpPr>
@@ -13128,7 +13128,7 @@
       </p:sp>
       <p:sp>
         <p:nvSpPr>
-          <p:cNvPr id="4" name="Text 2"/>
+          <p:cNvPr id="5" name="Text 2"/>
           <p:cNvSpPr/>
           <p:nvPr/>
         </p:nvSpPr>
@@ -14228,7 +14228,7 @@
       </p:graphicFrame>
       <p:sp>
         <p:nvSpPr>
-          <p:cNvPr id="6" name="Text 3"/>
+          <p:cNvPr id="7" name="Text 3"/>
           <p:cNvSpPr/>
           <p:nvPr/>
         </p:nvSpPr>
@@ -14281,7 +14281,7 @@
       </p:sp>
       <p:sp>
         <p:nvSpPr>
-          <p:cNvPr id="7" name="Text 4"/>
+          <p:cNvPr id="8" name="Text 4"/>
           <p:cNvSpPr/>
           <p:nvPr/>
         </p:nvSpPr>
@@ -14366,7 +14366,7 @@
       </p:grpSpPr>
       <p:sp>
         <p:nvSpPr>
-          <p:cNvPr id="2" name="Shape 0"/>
+          <p:cNvPr id="3" name="Shape 0"/>
           <p:cNvSpPr/>
           <p:nvPr/>
         </p:nvSpPr>
@@ -14386,7 +14386,7 @@
       </p:sp>
       <p:sp>
         <p:nvSpPr>
-          <p:cNvPr id="3" name="Text 1"/>
+          <p:cNvPr id="4" name="Text 1"/>
           <p:cNvSpPr/>
           <p:nvPr/>
         </p:nvSpPr>
@@ -14425,7 +14425,7 @@
       </p:sp>
       <p:sp>
         <p:nvSpPr>
-          <p:cNvPr id="4" name="Text 2"/>
+          <p:cNvPr id="5" name="Text 2"/>
           <p:cNvSpPr/>
           <p:nvPr/>
         </p:nvSpPr>
@@ -14464,7 +14464,7 @@
       </p:sp>
       <p:sp>
         <p:nvSpPr>
-          <p:cNvPr id="5" name="Shape 3"/>
+          <p:cNvPr id="6" name="Shape 3"/>
           <p:cNvSpPr/>
           <p:nvPr/>
         </p:nvSpPr>
@@ -14496,7 +14496,7 @@
       </p:sp>
       <p:sp>
         <p:nvSpPr>
-          <p:cNvPr id="6" name="Text 4"/>
+          <p:cNvPr id="7" name="Text 4"/>
           <p:cNvSpPr/>
           <p:nvPr/>
         </p:nvSpPr>
@@ -14535,7 +14535,7 @@
       </p:sp>
       <p:sp>
         <p:nvSpPr>
-          <p:cNvPr id="7" name="Text 5"/>
+          <p:cNvPr id="8" name="Text 5"/>
           <p:cNvSpPr/>
           <p:nvPr/>
         </p:nvSpPr>
@@ -14677,7 +14677,7 @@
       </p:sp>
       <p:sp>
         <p:nvSpPr>
-          <p:cNvPr id="8" name="Shape 6"/>
+          <p:cNvPr id="9" name="Shape 6"/>
           <p:cNvSpPr/>
           <p:nvPr/>
         </p:nvSpPr>
@@ -14709,7 +14709,7 @@
       </p:sp>
       <p:sp>
         <p:nvSpPr>
-          <p:cNvPr id="9" name="Shape 7"/>
+          <p:cNvPr id="10" name="Shape 7"/>
           <p:cNvSpPr/>
           <p:nvPr/>
         </p:nvSpPr>
@@ -14729,7 +14729,7 @@
       </p:sp>
       <p:sp>
         <p:nvSpPr>
-          <p:cNvPr id="10" name="Text 8"/>
+          <p:cNvPr id="11" name="Text 8"/>
           <p:cNvSpPr/>
           <p:nvPr/>
         </p:nvSpPr>
@@ -14768,7 +14768,7 @@
       </p:sp>
       <p:sp>
         <p:nvSpPr>
-          <p:cNvPr id="11" name="Text 9"/>
+          <p:cNvPr id="12" name="Text 9"/>
           <p:cNvSpPr/>
           <p:nvPr/>
         </p:nvSpPr>
@@ -14807,7 +14807,7 @@
       </p:sp>
       <p:sp>
         <p:nvSpPr>
-          <p:cNvPr id="12" name="Shape 10"/>
+          <p:cNvPr id="13" name="Shape 10"/>
           <p:cNvSpPr/>
           <p:nvPr/>
         </p:nvSpPr>
@@ -14839,7 +14839,7 @@
       </p:sp>
       <p:sp>
         <p:nvSpPr>
-          <p:cNvPr id="13" name="Shape 11"/>
+          <p:cNvPr id="14" name="Shape 11"/>
           <p:cNvSpPr/>
           <p:nvPr/>
         </p:nvSpPr>
@@ -14859,7 +14859,7 @@
       </p:sp>
       <p:sp>
         <p:nvSpPr>
-          <p:cNvPr id="14" name="Text 12"/>
+          <p:cNvPr id="15" name="Text 12"/>
           <p:cNvSpPr/>
           <p:nvPr/>
         </p:nvSpPr>
@@ -14898,7 +14898,7 @@
       </p:sp>
       <p:sp>
         <p:nvSpPr>
-          <p:cNvPr id="15" name="Text 13"/>
+          <p:cNvPr id="16" name="Text 13"/>
           <p:cNvSpPr/>
           <p:nvPr/>
         </p:nvSpPr>
@@ -14937,7 +14937,7 @@
       </p:sp>
       <p:sp>
         <p:nvSpPr>
-          <p:cNvPr id="16" name="Shape 14"/>
+          <p:cNvPr id="17" name="Shape 14"/>
           <p:cNvSpPr/>
           <p:nvPr/>
         </p:nvSpPr>
@@ -14969,7 +14969,7 @@
       </p:sp>
       <p:sp>
         <p:nvSpPr>
-          <p:cNvPr id="17" name="Shape 15"/>
+          <p:cNvPr id="18" name="Shape 15"/>
           <p:cNvSpPr/>
           <p:nvPr/>
         </p:nvSpPr>
@@ -14989,7 +14989,7 @@
       </p:sp>
       <p:sp>
         <p:nvSpPr>
-          <p:cNvPr id="18" name="Text 16"/>
+          <p:cNvPr id="19" name="Text 16"/>
           <p:cNvSpPr/>
           <p:nvPr/>
         </p:nvSpPr>
@@ -15028,7 +15028,7 @@
       </p:sp>
       <p:sp>
         <p:nvSpPr>
-          <p:cNvPr id="19" name="Text 17"/>
+          <p:cNvPr id="20" name="Text 17"/>
           <p:cNvSpPr/>
           <p:nvPr/>
         </p:nvSpPr>
@@ -15067,7 +15067,7 @@
       </p:sp>
       <p:sp>
         <p:nvSpPr>
-          <p:cNvPr id="20" name="Shape 18"/>
+          <p:cNvPr id="21" name="Shape 18"/>
           <p:cNvSpPr/>
           <p:nvPr/>
         </p:nvSpPr>
@@ -15099,7 +15099,7 @@
       </p:sp>
       <p:sp>
         <p:nvSpPr>
-          <p:cNvPr id="21" name="Shape 19"/>
+          <p:cNvPr id="22" name="Shape 19"/>
           <p:cNvSpPr/>
           <p:nvPr/>
         </p:nvSpPr>
@@ -15119,7 +15119,7 @@
       </p:sp>
       <p:sp>
         <p:nvSpPr>
-          <p:cNvPr id="22" name="Text 20"/>
+          <p:cNvPr id="23" name="Text 20"/>
           <p:cNvSpPr/>
           <p:nvPr/>
         </p:nvSpPr>
@@ -15158,7 +15158,7 @@
       </p:sp>
       <p:sp>
         <p:nvSpPr>
-          <p:cNvPr id="23" name="Text 21"/>
+          <p:cNvPr id="24" name="Text 21"/>
           <p:cNvSpPr/>
           <p:nvPr/>
         </p:nvSpPr>
@@ -15197,7 +15197,7 @@
       </p:sp>
       <p:sp>
         <p:nvSpPr>
-          <p:cNvPr id="24" name="Text 22"/>
+          <p:cNvPr id="25" name="Text 22"/>
           <p:cNvSpPr/>
           <p:nvPr/>
         </p:nvSpPr>
@@ -15282,7 +15282,7 @@
       </p:grpSpPr>
       <p:sp>
         <p:nvSpPr>
-          <p:cNvPr id="2" name="Shape 0"/>
+          <p:cNvPr id="3" name="Shape 0"/>
           <p:cNvSpPr/>
           <p:nvPr/>
         </p:nvSpPr>
@@ -15302,7 +15302,7 @@
       </p:sp>
       <p:sp>
         <p:nvSpPr>
-          <p:cNvPr id="3" name="Text 1"/>
+          <p:cNvPr id="4" name="Text 1"/>
           <p:cNvSpPr/>
           <p:nvPr/>
         </p:nvSpPr>
@@ -15341,7 +15341,7 @@
       </p:sp>
       <p:sp>
         <p:nvSpPr>
-          <p:cNvPr id="4" name="Text 2"/>
+          <p:cNvPr id="5" name="Text 2"/>
           <p:cNvSpPr/>
           <p:nvPr/>
         </p:nvSpPr>
@@ -15437,7 +15437,7 @@
       </p:sp>
       <p:sp>
         <p:nvSpPr>
-          <p:cNvPr id="5" name="Text 3"/>
+          <p:cNvPr id="6" name="Text 3"/>
           <p:cNvSpPr/>
           <p:nvPr/>
         </p:nvSpPr>
@@ -15578,7 +15578,7 @@
       </p:grpSpPr>
       <p:sp>
         <p:nvSpPr>
-          <p:cNvPr id="2" name="Shape 0"/>
+          <p:cNvPr id="3" name="Shape 0"/>
           <p:cNvSpPr/>
           <p:nvPr/>
         </p:nvSpPr>
@@ -15598,7 +15598,7 @@
       </p:sp>
       <p:sp>
         <p:nvSpPr>
-          <p:cNvPr id="3" name="Text 1"/>
+          <p:cNvPr id="4" name="Text 1"/>
           <p:cNvSpPr/>
           <p:nvPr/>
         </p:nvSpPr>
@@ -15637,7 +15637,7 @@
       </p:sp>
       <p:sp>
         <p:nvSpPr>
-          <p:cNvPr id="4" name="Text 2"/>
+          <p:cNvPr id="5" name="Text 2"/>
           <p:cNvSpPr/>
           <p:nvPr/>
         </p:nvSpPr>
@@ -15676,7 +15676,7 @@
       </p:sp>
       <p:sp>
         <p:nvSpPr>
-          <p:cNvPr id="5" name="Text 3"/>
+          <p:cNvPr id="6" name="Text 3"/>
           <p:cNvSpPr/>
           <p:nvPr/>
         </p:nvSpPr>
@@ -15757,7 +15757,7 @@
       </p:sp>
       <p:sp>
         <p:nvSpPr>
-          <p:cNvPr id="6" name="Shape 4"/>
+          <p:cNvPr id="7" name="Shape 4"/>
           <p:cNvSpPr/>
           <p:nvPr/>
         </p:nvSpPr>
@@ -15789,7 +15789,7 @@
       </p:sp>
       <p:sp>
         <p:nvSpPr>
-          <p:cNvPr id="7" name="Text 5"/>
+          <p:cNvPr id="8" name="Text 5"/>
           <p:cNvSpPr/>
           <p:nvPr/>
         </p:nvSpPr>
@@ -15828,7 +15828,7 @@
       </p:sp>
       <p:sp>
         <p:nvSpPr>
-          <p:cNvPr id="8" name="Text 6"/>
+          <p:cNvPr id="9" name="Text 6"/>
           <p:cNvSpPr/>
           <p:nvPr/>
         </p:nvSpPr>
@@ -15901,7 +15901,7 @@
       </p:sp>
       <p:sp>
         <p:nvSpPr>
-          <p:cNvPr id="9" name="Text 7"/>
+          <p:cNvPr id="10" name="Text 7"/>
           <p:cNvSpPr/>
           <p:nvPr/>
         </p:nvSpPr>
@@ -15991,7 +15991,7 @@
       </p:sp>
       <p:sp>
         <p:nvSpPr>
-          <p:cNvPr id="10" name="Shape 8"/>
+          <p:cNvPr id="11" name="Shape 8"/>
           <p:cNvSpPr/>
           <p:nvPr/>
         </p:nvSpPr>
@@ -16023,7 +16023,7 @@
       </p:sp>
       <p:sp>
         <p:nvSpPr>
-          <p:cNvPr id="11" name="Text 9"/>
+          <p:cNvPr id="12" name="Text 9"/>
           <p:cNvSpPr/>
           <p:nvPr/>
         </p:nvSpPr>
@@ -16062,7 +16062,7 @@
       </p:sp>
       <p:sp>
         <p:nvSpPr>
-          <p:cNvPr id="12" name="Text 10"/>
+          <p:cNvPr id="13" name="Text 10"/>
           <p:cNvSpPr/>
           <p:nvPr/>
         </p:nvSpPr>
@@ -16101,7 +16101,7 @@
       </p:sp>
       <p:sp>
         <p:nvSpPr>
-          <p:cNvPr id="13" name="Text 11"/>
+          <p:cNvPr id="14" name="Text 11"/>
           <p:cNvSpPr/>
           <p:nvPr/>
         </p:nvSpPr>
@@ -16140,7 +16140,7 @@
       </p:sp>
       <p:sp>
         <p:nvSpPr>
-          <p:cNvPr id="14" name="Text 12"/>
+          <p:cNvPr id="15" name="Text 12"/>
           <p:cNvSpPr/>
           <p:nvPr/>
         </p:nvSpPr>
@@ -16316,7 +16316,7 @@
       </p:grpSpPr>
       <p:sp>
         <p:nvSpPr>
-          <p:cNvPr id="2" name="Shape 0"/>
+          <p:cNvPr id="3" name="Shape 0"/>
           <p:cNvSpPr/>
           <p:nvPr/>
         </p:nvSpPr>
@@ -16336,7 +16336,7 @@
       </p:sp>
       <p:sp>
         <p:nvSpPr>
-          <p:cNvPr id="3" name="Text 1"/>
+          <p:cNvPr id="4" name="Text 1"/>
           <p:cNvSpPr/>
           <p:nvPr/>
         </p:nvSpPr>
@@ -16375,7 +16375,7 @@
       </p:sp>
       <p:sp>
         <p:nvSpPr>
-          <p:cNvPr id="4" name="Text 2"/>
+          <p:cNvPr id="5" name="Text 2"/>
           <p:cNvSpPr/>
           <p:nvPr/>
         </p:nvSpPr>
@@ -16414,7 +16414,7 @@
       </p:sp>
       <p:sp>
         <p:nvSpPr>
-          <p:cNvPr id="5" name="Shape 3"/>
+          <p:cNvPr id="6" name="Shape 3"/>
           <p:cNvSpPr/>
           <p:nvPr/>
         </p:nvSpPr>
@@ -16446,7 +16446,7 @@
       </p:sp>
       <p:sp>
         <p:nvSpPr>
-          <p:cNvPr id="6" name="Shape 4"/>
+          <p:cNvPr id="7" name="Shape 4"/>
           <p:cNvSpPr/>
           <p:nvPr/>
         </p:nvSpPr>
@@ -16466,7 +16466,7 @@
       </p:sp>
       <p:sp>
         <p:nvSpPr>
-          <p:cNvPr id="7" name="Text 5"/>
+          <p:cNvPr id="8" name="Text 5"/>
           <p:cNvSpPr/>
           <p:nvPr/>
         </p:nvSpPr>
@@ -16505,7 +16505,7 @@
       </p:sp>
       <p:sp>
         <p:nvSpPr>
-          <p:cNvPr id="8" name="Text 6"/>
+          <p:cNvPr id="9" name="Text 6"/>
           <p:cNvSpPr/>
           <p:nvPr/>
         </p:nvSpPr>
@@ -16544,7 +16544,7 @@
       </p:sp>
       <p:sp>
         <p:nvSpPr>
-          <p:cNvPr id="9" name="Text 7"/>
+          <p:cNvPr id="10" name="Text 7"/>
           <p:cNvSpPr/>
           <p:nvPr/>
         </p:nvSpPr>
@@ -16583,7 +16583,7 @@
       </p:sp>
       <p:sp>
         <p:nvSpPr>
-          <p:cNvPr id="10" name="Shape 8"/>
+          <p:cNvPr id="11" name="Shape 8"/>
           <p:cNvSpPr/>
           <p:nvPr/>
         </p:nvSpPr>
@@ -16615,7 +16615,7 @@
       </p:sp>
       <p:sp>
         <p:nvSpPr>
-          <p:cNvPr id="11" name="Shape 9"/>
+          <p:cNvPr id="12" name="Shape 9"/>
           <p:cNvSpPr/>
           <p:nvPr/>
         </p:nvSpPr>
@@ -16635,7 +16635,7 @@
       </p:sp>
       <p:sp>
         <p:nvSpPr>
-          <p:cNvPr id="12" name="Text 10"/>
+          <p:cNvPr id="13" name="Text 10"/>
           <p:cNvSpPr/>
           <p:nvPr/>
         </p:nvSpPr>
@@ -16674,7 +16674,7 @@
       </p:sp>
       <p:sp>
         <p:nvSpPr>
-          <p:cNvPr id="13" name="Text 11"/>
+          <p:cNvPr id="14" name="Text 11"/>
           <p:cNvSpPr/>
           <p:nvPr/>
         </p:nvSpPr>
@@ -16713,7 +16713,7 @@
       </p:sp>
       <p:sp>
         <p:nvSpPr>
-          <p:cNvPr id="14" name="Text 12"/>
+          <p:cNvPr id="15" name="Text 12"/>
           <p:cNvSpPr/>
           <p:nvPr/>
         </p:nvSpPr>
@@ -16752,7 +16752,7 @@
       </p:sp>
       <p:sp>
         <p:nvSpPr>
-          <p:cNvPr id="15" name="Shape 13"/>
+          <p:cNvPr id="16" name="Shape 13"/>
           <p:cNvSpPr/>
           <p:nvPr/>
         </p:nvSpPr>
@@ -16784,7 +16784,7 @@
       </p:sp>
       <p:sp>
         <p:nvSpPr>
-          <p:cNvPr id="16" name="Shape 14"/>
+          <p:cNvPr id="17" name="Shape 14"/>
           <p:cNvSpPr/>
           <p:nvPr/>
         </p:nvSpPr>
@@ -16804,7 +16804,7 @@
       </p:sp>
       <p:sp>
         <p:nvSpPr>
-          <p:cNvPr id="17" name="Text 15"/>
+          <p:cNvPr id="18" name="Text 15"/>
           <p:cNvSpPr/>
           <p:nvPr/>
         </p:nvSpPr>
@@ -16843,7 +16843,7 @@
       </p:sp>
       <p:sp>
         <p:nvSpPr>
-          <p:cNvPr id="18" name="Text 16"/>
+          <p:cNvPr id="19" name="Text 16"/>
           <p:cNvSpPr/>
           <p:nvPr/>
         </p:nvSpPr>
@@ -16882,7 +16882,7 @@
       </p:sp>
       <p:sp>
         <p:nvSpPr>
-          <p:cNvPr id="19" name="Text 17"/>
+          <p:cNvPr id="20" name="Text 17"/>
           <p:cNvSpPr/>
           <p:nvPr/>
         </p:nvSpPr>
@@ -16921,7 +16921,7 @@
       </p:sp>
       <p:sp>
         <p:nvSpPr>
-          <p:cNvPr id="20" name="Text 18"/>
+          <p:cNvPr id="21" name="Text 18"/>
           <p:cNvSpPr/>
           <p:nvPr/>
         </p:nvSpPr>
@@ -16960,7 +16960,7 @@
       </p:sp>
       <p:sp>
         <p:nvSpPr>
-          <p:cNvPr id="21" name="Text 19"/>
+          <p:cNvPr id="22" name="Text 19"/>
           <p:cNvSpPr/>
           <p:nvPr/>
         </p:nvSpPr>
@@ -17171,7 +17171,7 @@
       </p:grpSpPr>
       <p:sp>
         <p:nvSpPr>
-          <p:cNvPr id="2" name="Shape 0"/>
+          <p:cNvPr id="3" name="Shape 0"/>
           <p:cNvSpPr/>
           <p:nvPr/>
         </p:nvSpPr>
@@ -17191,7 +17191,7 @@
       </p:sp>
       <p:sp>
         <p:nvSpPr>
-          <p:cNvPr id="3" name="Text 1"/>
+          <p:cNvPr id="4" name="Text 1"/>
           <p:cNvSpPr/>
           <p:nvPr/>
         </p:nvSpPr>
@@ -17230,7 +17230,7 @@
       </p:sp>
       <p:sp>
         <p:nvSpPr>
-          <p:cNvPr id="4" name="Text 2"/>
+          <p:cNvPr id="5" name="Text 2"/>
           <p:cNvSpPr/>
           <p:nvPr/>
         </p:nvSpPr>
@@ -17269,7 +17269,7 @@
       </p:sp>
       <p:sp>
         <p:nvSpPr>
-          <p:cNvPr id="5" name="Text 3"/>
+          <p:cNvPr id="6" name="Text 3"/>
           <p:cNvSpPr/>
           <p:nvPr/>
         </p:nvSpPr>
@@ -17308,7 +17308,7 @@
       </p:sp>
       <p:sp>
         <p:nvSpPr>
-          <p:cNvPr id="6" name="Shape 4"/>
+          <p:cNvPr id="7" name="Shape 4"/>
           <p:cNvSpPr/>
           <p:nvPr/>
         </p:nvSpPr>
@@ -17340,7 +17340,7 @@
       </p:sp>
       <p:sp>
         <p:nvSpPr>
-          <p:cNvPr id="7" name="Shape 5"/>
+          <p:cNvPr id="8" name="Shape 5"/>
           <p:cNvSpPr/>
           <p:nvPr/>
         </p:nvSpPr>
@@ -17360,7 +17360,7 @@
       </p:sp>
       <p:sp>
         <p:nvSpPr>
-          <p:cNvPr id="8" name="Text 6"/>
+          <p:cNvPr id="9" name="Text 6"/>
           <p:cNvSpPr/>
           <p:nvPr/>
         </p:nvSpPr>
@@ -17399,7 +17399,7 @@
       </p:sp>
       <p:sp>
         <p:nvSpPr>
-          <p:cNvPr id="9" name="Text 7"/>
+          <p:cNvPr id="10" name="Text 7"/>
           <p:cNvSpPr/>
           <p:nvPr/>
         </p:nvSpPr>
@@ -17438,7 +17438,7 @@
       </p:sp>
       <p:sp>
         <p:nvSpPr>
-          <p:cNvPr id="10" name="Text 8"/>
+          <p:cNvPr id="11" name="Text 8"/>
           <p:cNvSpPr/>
           <p:nvPr/>
         </p:nvSpPr>
@@ -17477,7 +17477,7 @@
       </p:sp>
       <p:sp>
         <p:nvSpPr>
-          <p:cNvPr id="11" name="Text 9"/>
+          <p:cNvPr id="12" name="Text 9"/>
           <p:cNvSpPr/>
           <p:nvPr/>
         </p:nvSpPr>
@@ -17516,7 +17516,7 @@
       </p:sp>
       <p:sp>
         <p:nvSpPr>
-          <p:cNvPr id="12" name="Shape 10"/>
+          <p:cNvPr id="13" name="Shape 10"/>
           <p:cNvSpPr/>
           <p:nvPr/>
         </p:nvSpPr>
@@ -17548,7 +17548,7 @@
       </p:sp>
       <p:sp>
         <p:nvSpPr>
-          <p:cNvPr id="13" name="Shape 11"/>
+          <p:cNvPr id="14" name="Shape 11"/>
           <p:cNvSpPr/>
           <p:nvPr/>
         </p:nvSpPr>
@@ -17568,7 +17568,7 @@
       </p:sp>
       <p:sp>
         <p:nvSpPr>
-          <p:cNvPr id="14" name="Text 12"/>
+          <p:cNvPr id="15" name="Text 12"/>
           <p:cNvSpPr/>
           <p:nvPr/>
         </p:nvSpPr>
@@ -17607,7 +17607,7 @@
       </p:sp>
       <p:sp>
         <p:nvSpPr>
-          <p:cNvPr id="15" name="Text 13"/>
+          <p:cNvPr id="16" name="Text 13"/>
           <p:cNvSpPr/>
           <p:nvPr/>
         </p:nvSpPr>
@@ -17646,7 +17646,7 @@
       </p:sp>
       <p:sp>
         <p:nvSpPr>
-          <p:cNvPr id="16" name="Text 14"/>
+          <p:cNvPr id="17" name="Text 14"/>
           <p:cNvSpPr/>
           <p:nvPr/>
         </p:nvSpPr>
@@ -17685,7 +17685,7 @@
       </p:sp>
       <p:sp>
         <p:nvSpPr>
-          <p:cNvPr id="17" name="Text 15"/>
+          <p:cNvPr id="18" name="Text 15"/>
           <p:cNvSpPr/>
           <p:nvPr/>
         </p:nvSpPr>
@@ -17724,7 +17724,7 @@
       </p:sp>
       <p:sp>
         <p:nvSpPr>
-          <p:cNvPr id="18" name="Shape 16"/>
+          <p:cNvPr id="19" name="Shape 16"/>
           <p:cNvSpPr/>
           <p:nvPr/>
         </p:nvSpPr>
@@ -17756,7 +17756,7 @@
       </p:sp>
       <p:sp>
         <p:nvSpPr>
-          <p:cNvPr id="19" name="Shape 17"/>
+          <p:cNvPr id="20" name="Shape 17"/>
           <p:cNvSpPr/>
           <p:nvPr/>
         </p:nvSpPr>
@@ -17776,7 +17776,7 @@
       </p:sp>
       <p:sp>
         <p:nvSpPr>
-          <p:cNvPr id="20" name="Text 18"/>
+          <p:cNvPr id="21" name="Text 18"/>
           <p:cNvSpPr/>
           <p:nvPr/>
         </p:nvSpPr>
@@ -17815,7 +17815,7 @@
       </p:sp>
       <p:sp>
         <p:nvSpPr>
-          <p:cNvPr id="21" name="Text 19"/>
+          <p:cNvPr id="22" name="Text 19"/>
           <p:cNvSpPr/>
           <p:nvPr/>
         </p:nvSpPr>
@@ -17854,7 +17854,7 @@
       </p:sp>
       <p:sp>
         <p:nvSpPr>
-          <p:cNvPr id="22" name="Text 20"/>
+          <p:cNvPr id="23" name="Text 20"/>
           <p:cNvSpPr/>
           <p:nvPr/>
         </p:nvSpPr>
@@ -17893,7 +17893,7 @@
       </p:sp>
       <p:sp>
         <p:nvSpPr>
-          <p:cNvPr id="23" name="Text 21"/>
+          <p:cNvPr id="24" name="Text 21"/>
           <p:cNvSpPr/>
           <p:nvPr/>
         </p:nvSpPr>
@@ -17932,7 +17932,7 @@
       </p:sp>
       <p:sp>
         <p:nvSpPr>
-          <p:cNvPr id="24" name="Shape 22"/>
+          <p:cNvPr id="25" name="Shape 22"/>
           <p:cNvSpPr/>
           <p:nvPr/>
         </p:nvSpPr>
@@ -17964,7 +17964,7 @@
       </p:sp>
       <p:sp>
         <p:nvSpPr>
-          <p:cNvPr id="25" name="Shape 23"/>
+          <p:cNvPr id="26" name="Shape 23"/>
           <p:cNvSpPr/>
           <p:nvPr/>
         </p:nvSpPr>
@@ -17984,7 +17984,7 @@
       </p:sp>
       <p:sp>
         <p:nvSpPr>
-          <p:cNvPr id="26" name="Text 24"/>
+          <p:cNvPr id="27" name="Text 24"/>
           <p:cNvSpPr/>
           <p:nvPr/>
         </p:nvSpPr>
@@ -18023,7 +18023,7 @@
       </p:sp>
       <p:sp>
         <p:nvSpPr>
-          <p:cNvPr id="27" name="Text 25"/>
+          <p:cNvPr id="28" name="Text 25"/>
           <p:cNvSpPr/>
           <p:nvPr/>
         </p:nvSpPr>
@@ -18062,7 +18062,7 @@
       </p:sp>
       <p:sp>
         <p:nvSpPr>
-          <p:cNvPr id="28" name="Text 26"/>
+          <p:cNvPr id="29" name="Text 26"/>
           <p:cNvSpPr/>
           <p:nvPr/>
         </p:nvSpPr>
@@ -18101,7 +18101,7 @@
       </p:sp>
       <p:sp>
         <p:nvSpPr>
-          <p:cNvPr id="29" name="Text 27"/>
+          <p:cNvPr id="30" name="Text 27"/>
           <p:cNvSpPr/>
           <p:nvPr/>
         </p:nvSpPr>
@@ -18154,7 +18154,7 @@
       </p:sp>
       <p:sp>
         <p:nvSpPr>
-          <p:cNvPr id="30" name="Text 28"/>
+          <p:cNvPr id="31" name="Text 28"/>
           <p:cNvSpPr/>
           <p:nvPr/>
         </p:nvSpPr>
@@ -18193,7 +18193,7 @@
       </p:sp>
       <p:sp>
         <p:nvSpPr>
-          <p:cNvPr id="31" name="Text 29"/>
+          <p:cNvPr id="32" name="Text 29"/>
           <p:cNvSpPr/>
           <p:nvPr/>
         </p:nvSpPr>
@@ -18369,7 +18369,7 @@
       </p:grpSpPr>
       <p:sp>
         <p:nvSpPr>
-          <p:cNvPr id="2" name="Shape 0"/>
+          <p:cNvPr id="3" name="Shape 0"/>
           <p:cNvSpPr/>
           <p:nvPr/>
         </p:nvSpPr>
@@ -18389,7 +18389,7 @@
       </p:sp>
       <p:sp>
         <p:nvSpPr>
-          <p:cNvPr id="3" name="Text 1"/>
+          <p:cNvPr id="4" name="Text 1"/>
           <p:cNvSpPr/>
           <p:nvPr/>
         </p:nvSpPr>
@@ -18428,7 +18428,7 @@
       </p:sp>
       <p:sp>
         <p:nvSpPr>
-          <p:cNvPr id="4" name="Text 2"/>
+          <p:cNvPr id="5" name="Text 2"/>
           <p:cNvSpPr/>
           <p:nvPr/>
         </p:nvSpPr>
@@ -18467,7 +18467,7 @@
       </p:sp>
       <p:graphicFrame>
         <p:nvGraphicFramePr>
-          <p:cNvPr id="5" name="Chart 0" descr=""/>
+          <p:cNvPr id="6" name="Chart 0" descr=""/>
           <p:cNvGraphicFramePr/>
           <p:nvPr/>
         </p:nvGraphicFramePr>
@@ -18483,7 +18483,7 @@
       </p:graphicFrame>
       <p:sp>
         <p:nvSpPr>
-          <p:cNvPr id="6" name="Shape 3"/>
+          <p:cNvPr id="7" name="Shape 3"/>
           <p:cNvSpPr/>
           <p:nvPr/>
         </p:nvSpPr>
@@ -18515,7 +18515,7 @@
       </p:sp>
       <p:sp>
         <p:nvSpPr>
-          <p:cNvPr id="7" name="Text 4"/>
+          <p:cNvPr id="8" name="Text 4"/>
           <p:cNvSpPr/>
           <p:nvPr/>
         </p:nvSpPr>
@@ -18554,7 +18554,7 @@
       </p:sp>
       <p:sp>
         <p:nvSpPr>
-          <p:cNvPr id="8" name="Text 5"/>
+          <p:cNvPr id="9" name="Text 5"/>
           <p:cNvSpPr/>
           <p:nvPr/>
         </p:nvSpPr>
@@ -18650,7 +18650,7 @@
       </p:sp>
       <p:sp>
         <p:nvSpPr>
-          <p:cNvPr id="9" name="Shape 6"/>
+          <p:cNvPr id="10" name="Shape 6"/>
           <p:cNvSpPr/>
           <p:nvPr/>
         </p:nvSpPr>
@@ -18670,7 +18670,7 @@
       </p:sp>
       <p:sp>
         <p:nvSpPr>
-          <p:cNvPr id="10" name="Text 7"/>
+          <p:cNvPr id="11" name="Text 7"/>
           <p:cNvSpPr/>
           <p:nvPr/>
         </p:nvSpPr>
@@ -18751,7 +18751,7 @@
       </p:sp>
       <p:sp>
         <p:nvSpPr>
-          <p:cNvPr id="11" name="Text 8"/>
+          <p:cNvPr id="12" name="Text 8"/>
           <p:cNvSpPr/>
           <p:nvPr/>
         </p:nvSpPr>
@@ -18871,7 +18871,7 @@
       </p:grpSpPr>
       <p:sp>
         <p:nvSpPr>
-          <p:cNvPr id="2" name="Shape 0"/>
+          <p:cNvPr id="3" name="Shape 0"/>
           <p:cNvSpPr/>
           <p:nvPr/>
         </p:nvSpPr>
@@ -18891,7 +18891,7 @@
       </p:sp>
       <p:sp>
         <p:nvSpPr>
-          <p:cNvPr id="3" name="Text 1"/>
+          <p:cNvPr id="4" name="Text 1"/>
           <p:cNvSpPr/>
           <p:nvPr/>
         </p:nvSpPr>
@@ -18930,7 +18930,7 @@
       </p:sp>
       <p:sp>
         <p:nvSpPr>
-          <p:cNvPr id="4" name="Text 2"/>
+          <p:cNvPr id="5" name="Text 2"/>
           <p:cNvSpPr/>
           <p:nvPr/>
         </p:nvSpPr>
@@ -18969,7 +18969,7 @@
       </p:sp>
       <p:sp>
         <p:nvSpPr>
-          <p:cNvPr id="5" name="Text 3"/>
+          <p:cNvPr id="6" name="Text 3"/>
           <p:cNvSpPr/>
           <p:nvPr/>
         </p:nvSpPr>
@@ -19008,7 +19008,7 @@
       </p:sp>
       <p:graphicFrame>
         <p:nvGraphicFramePr>
-          <p:cNvPr id="6" name="Chart 0" descr=""/>
+          <p:cNvPr id="7" name="Chart 0" descr=""/>
           <p:cNvGraphicFramePr/>
           <p:nvPr/>
         </p:nvGraphicFramePr>
@@ -19024,7 +19024,7 @@
       </p:graphicFrame>
       <p:sp>
         <p:nvSpPr>
-          <p:cNvPr id="7" name="Shape 4"/>
+          <p:cNvPr id="8" name="Shape 4"/>
           <p:cNvSpPr/>
           <p:nvPr/>
         </p:nvSpPr>
@@ -19056,7 +19056,7 @@
       </p:sp>
       <p:sp>
         <p:nvSpPr>
-          <p:cNvPr id="8" name="Text 5"/>
+          <p:cNvPr id="9" name="Text 5"/>
           <p:cNvSpPr/>
           <p:nvPr/>
         </p:nvSpPr>
@@ -19095,7 +19095,7 @@
       </p:sp>
       <p:sp>
         <p:nvSpPr>
-          <p:cNvPr id="9" name="Text 6"/>
+          <p:cNvPr id="10" name="Text 6"/>
           <p:cNvSpPr/>
           <p:nvPr/>
         </p:nvSpPr>
@@ -19134,7 +19134,7 @@
       </p:sp>
       <p:sp>
         <p:nvSpPr>
-          <p:cNvPr id="10" name="Text 7"/>
+          <p:cNvPr id="11" name="Text 7"/>
           <p:cNvSpPr/>
           <p:nvPr/>
         </p:nvSpPr>
@@ -19173,7 +19173,7 @@
       </p:sp>
       <p:sp>
         <p:nvSpPr>
-          <p:cNvPr id="11" name="Text 8"/>
+          <p:cNvPr id="12" name="Text 8"/>
           <p:cNvSpPr/>
           <p:nvPr/>
         </p:nvSpPr>
@@ -19314,7 +19314,7 @@
       </p:grpSpPr>
       <p:sp>
         <p:nvSpPr>
-          <p:cNvPr id="2" name="Shape 0"/>
+          <p:cNvPr id="3" name="Shape 0"/>
           <p:cNvSpPr/>
           <p:nvPr/>
         </p:nvSpPr>
@@ -19334,7 +19334,7 @@
       </p:sp>
       <p:sp>
         <p:nvSpPr>
-          <p:cNvPr id="3" name="Text 1"/>
+          <p:cNvPr id="4" name="Text 1"/>
           <p:cNvSpPr/>
           <p:nvPr/>
         </p:nvSpPr>
@@ -19373,7 +19373,7 @@
       </p:sp>
       <p:sp>
         <p:nvSpPr>
-          <p:cNvPr id="4" name="Text 2"/>
+          <p:cNvPr id="5" name="Text 2"/>
           <p:cNvSpPr/>
           <p:nvPr/>
         </p:nvSpPr>
@@ -19412,7 +19412,7 @@
       </p:sp>
       <p:sp>
         <p:nvSpPr>
-          <p:cNvPr id="5" name="Shape 3"/>
+          <p:cNvPr id="6" name="Shape 3"/>
           <p:cNvSpPr/>
           <p:nvPr/>
         </p:nvSpPr>
@@ -19444,7 +19444,7 @@
       </p:sp>
       <p:sp>
         <p:nvSpPr>
-          <p:cNvPr id="6" name="Shape 4"/>
+          <p:cNvPr id="7" name="Shape 4"/>
           <p:cNvSpPr/>
           <p:nvPr/>
         </p:nvSpPr>
@@ -19464,7 +19464,7 @@
       </p:sp>
       <p:sp>
         <p:nvSpPr>
-          <p:cNvPr id="7" name="Text 5"/>
+          <p:cNvPr id="8" name="Text 5"/>
           <p:cNvSpPr/>
           <p:nvPr/>
         </p:nvSpPr>
@@ -19503,7 +19503,7 @@
       </p:sp>
       <p:sp>
         <p:nvSpPr>
-          <p:cNvPr id="8" name="Text 6"/>
+          <p:cNvPr id="9" name="Text 6"/>
           <p:cNvSpPr/>
           <p:nvPr/>
         </p:nvSpPr>
@@ -19542,7 +19542,7 @@
       </p:sp>
       <p:sp>
         <p:nvSpPr>
-          <p:cNvPr id="9" name="Text 7"/>
+          <p:cNvPr id="10" name="Text 7"/>
           <p:cNvSpPr/>
           <p:nvPr/>
         </p:nvSpPr>
@@ -19581,7 +19581,7 @@
       </p:sp>
       <p:sp>
         <p:nvSpPr>
-          <p:cNvPr id="10" name="Shape 8"/>
+          <p:cNvPr id="11" name="Shape 8"/>
           <p:cNvSpPr/>
           <p:nvPr/>
         </p:nvSpPr>
@@ -19613,7 +19613,7 @@
       </p:sp>
       <p:sp>
         <p:nvSpPr>
-          <p:cNvPr id="11" name="Shape 9"/>
+          <p:cNvPr id="12" name="Shape 9"/>
           <p:cNvSpPr/>
           <p:nvPr/>
         </p:nvSpPr>
@@ -19633,7 +19633,7 @@
       </p:sp>
       <p:sp>
         <p:nvSpPr>
-          <p:cNvPr id="12" name="Text 10"/>
+          <p:cNvPr id="13" name="Text 10"/>
           <p:cNvSpPr/>
           <p:nvPr/>
         </p:nvSpPr>
@@ -19672,7 +19672,7 @@
       </p:sp>
       <p:sp>
         <p:nvSpPr>
-          <p:cNvPr id="13" name="Text 11"/>
+          <p:cNvPr id="14" name="Text 11"/>
           <p:cNvSpPr/>
           <p:nvPr/>
         </p:nvSpPr>
@@ -19711,7 +19711,7 @@
       </p:sp>
       <p:sp>
         <p:nvSpPr>
-          <p:cNvPr id="14" name="Text 12"/>
+          <p:cNvPr id="15" name="Text 12"/>
           <p:cNvSpPr/>
           <p:nvPr/>
         </p:nvSpPr>
@@ -19750,7 +19750,7 @@
       </p:sp>
       <p:sp>
         <p:nvSpPr>
-          <p:cNvPr id="15" name="Shape 13"/>
+          <p:cNvPr id="16" name="Shape 13"/>
           <p:cNvSpPr/>
           <p:nvPr/>
         </p:nvSpPr>
@@ -19782,7 +19782,7 @@
       </p:sp>
       <p:sp>
         <p:nvSpPr>
-          <p:cNvPr id="16" name="Shape 14"/>
+          <p:cNvPr id="17" name="Shape 14"/>
           <p:cNvSpPr/>
           <p:nvPr/>
         </p:nvSpPr>
@@ -19802,7 +19802,7 @@
       </p:sp>
       <p:sp>
         <p:nvSpPr>
-          <p:cNvPr id="17" name="Text 15"/>
+          <p:cNvPr id="18" name="Text 15"/>
           <p:cNvSpPr/>
           <p:nvPr/>
         </p:nvSpPr>
@@ -19841,7 +19841,7 @@
       </p:sp>
       <p:sp>
         <p:nvSpPr>
-          <p:cNvPr id="18" name="Text 16"/>
+          <p:cNvPr id="19" name="Text 16"/>
           <p:cNvSpPr/>
           <p:nvPr/>
         </p:nvSpPr>
@@ -19880,7 +19880,7 @@
       </p:sp>
       <p:sp>
         <p:nvSpPr>
-          <p:cNvPr id="19" name="Text 17"/>
+          <p:cNvPr id="20" name="Text 17"/>
           <p:cNvSpPr/>
           <p:nvPr/>
         </p:nvSpPr>
@@ -19919,7 +19919,7 @@
       </p:sp>
       <p:sp>
         <p:nvSpPr>
-          <p:cNvPr id="20" name="Shape 18"/>
+          <p:cNvPr id="21" name="Shape 18"/>
           <p:cNvSpPr/>
           <p:nvPr/>
         </p:nvSpPr>
@@ -19951,7 +19951,7 @@
       </p:sp>
       <p:sp>
         <p:nvSpPr>
-          <p:cNvPr id="21" name="Shape 19"/>
+          <p:cNvPr id="22" name="Shape 19"/>
           <p:cNvSpPr/>
           <p:nvPr/>
         </p:nvSpPr>
@@ -19971,7 +19971,7 @@
       </p:sp>
       <p:sp>
         <p:nvSpPr>
-          <p:cNvPr id="22" name="Text 20"/>
+          <p:cNvPr id="23" name="Text 20"/>
           <p:cNvSpPr/>
           <p:nvPr/>
         </p:nvSpPr>
@@ -20010,7 +20010,7 @@
       </p:sp>
       <p:sp>
         <p:nvSpPr>
-          <p:cNvPr id="23" name="Text 21"/>
+          <p:cNvPr id="24" name="Text 21"/>
           <p:cNvSpPr/>
           <p:nvPr/>
         </p:nvSpPr>
@@ -20049,7 +20049,7 @@
       </p:sp>
       <p:sp>
         <p:nvSpPr>
-          <p:cNvPr id="24" name="Text 22"/>
+          <p:cNvPr id="25" name="Text 22"/>
           <p:cNvSpPr/>
           <p:nvPr/>
         </p:nvSpPr>
@@ -20088,7 +20088,7 @@
       </p:sp>
       <p:sp>
         <p:nvSpPr>
-          <p:cNvPr id="25" name="Shape 23"/>
+          <p:cNvPr id="26" name="Shape 23"/>
           <p:cNvSpPr/>
           <p:nvPr/>
         </p:nvSpPr>
@@ -20120,7 +20120,7 @@
       </p:sp>
       <p:sp>
         <p:nvSpPr>
-          <p:cNvPr id="26" name="Shape 24"/>
+          <p:cNvPr id="27" name="Shape 24"/>
           <p:cNvSpPr/>
           <p:nvPr/>
         </p:nvSpPr>
@@ -20140,7 +20140,7 @@
       </p:sp>
       <p:sp>
         <p:nvSpPr>
-          <p:cNvPr id="27" name="Text 25"/>
+          <p:cNvPr id="28" name="Text 25"/>
           <p:cNvSpPr/>
           <p:nvPr/>
         </p:nvSpPr>
@@ -20179,7 +20179,7 @@
       </p:sp>
       <p:sp>
         <p:nvSpPr>
-          <p:cNvPr id="28" name="Text 26"/>
+          <p:cNvPr id="29" name="Text 26"/>
           <p:cNvSpPr/>
           <p:nvPr/>
         </p:nvSpPr>
@@ -20218,7 +20218,7 @@
       </p:sp>
       <p:sp>
         <p:nvSpPr>
-          <p:cNvPr id="29" name="Text 27"/>
+          <p:cNvPr id="30" name="Text 27"/>
           <p:cNvSpPr/>
           <p:nvPr/>
         </p:nvSpPr>
@@ -20257,7 +20257,7 @@
       </p:sp>
       <p:sp>
         <p:nvSpPr>
-          <p:cNvPr id="30" name="Text 28"/>
+          <p:cNvPr id="31" name="Text 28"/>
           <p:cNvSpPr/>
           <p:nvPr/>
         </p:nvSpPr>
@@ -20296,7 +20296,7 @@
       </p:sp>
       <p:sp>
         <p:nvSpPr>
-          <p:cNvPr id="31" name="Text 29"/>
+          <p:cNvPr id="32" name="Text 29"/>
           <p:cNvSpPr/>
           <p:nvPr/>
         </p:nvSpPr>
@@ -20472,7 +20472,7 @@
       </p:grpSpPr>
       <p:sp>
         <p:nvSpPr>
-          <p:cNvPr id="2" name="Shape 0"/>
+          <p:cNvPr id="3" name="Shape 0"/>
           <p:cNvSpPr/>
           <p:nvPr/>
         </p:nvSpPr>
@@ -20492,7 +20492,7 @@
       </p:sp>
       <p:sp>
         <p:nvSpPr>
-          <p:cNvPr id="3" name="Text 1"/>
+          <p:cNvPr id="4" name="Text 1"/>
           <p:cNvSpPr/>
           <p:nvPr/>
         </p:nvSpPr>
@@ -20531,7 +20531,7 @@
       </p:sp>
       <p:sp>
         <p:nvSpPr>
-          <p:cNvPr id="4" name="Text 2"/>
+          <p:cNvPr id="5" name="Text 2"/>
           <p:cNvSpPr/>
           <p:nvPr/>
         </p:nvSpPr>
@@ -20613,7 +20613,7 @@
       </p:sp>
       <p:sp>
         <p:nvSpPr>
-          <p:cNvPr id="5" name="Text 3"/>
+          <p:cNvPr id="6" name="Text 3"/>
           <p:cNvSpPr/>
           <p:nvPr/>
         </p:nvSpPr>
@@ -20652,7 +20652,7 @@
       </p:sp>
       <p:sp>
         <p:nvSpPr>
-          <p:cNvPr id="6" name="Text 4"/>
+          <p:cNvPr id="7" name="Text 4"/>
           <p:cNvSpPr/>
           <p:nvPr/>
         </p:nvSpPr>
